--- a/en/slides/24-Computer_Architecture-Superscalar_HPC_GPU_FPGA-Code.pptx
+++ b/en/slides/24-Computer_Architecture-Superscalar_HPC_GPU_FPGA-Code.pptx
@@ -127,25 +127,45 @@
   <p:extLst>
     <p:ext uri="{521415D9-36F7-43E2-AB2F-B90AF26B5E84}">
       <p14:sectionLst xmlns:p14="http://schemas.microsoft.com/office/powerpoint/2010/main">
-        <p14:section name="Opening" id="{c303d89f-a863-5758-8063-9d94ca4e2e79}">
+        <p14:section name="Opening" id="{21f478a5-9c34-f0c0-df6f-8d993d9837e9}">
           <p14:sldIdLst>
             <p14:sldId id="256"/>
             <p14:sldId id="257"/>
           </p14:sldIdLst>
         </p14:section>
-        <p14:section name="The listings" id="{d7859ae7-3f69-38b3-0672-987666db99c5}">
+        <p14:section name="Warm-up on the machine" id="{133957aa-7672-48e3-efb6-0b5355f5c776}">
           <p14:sldIdLst>
             <p14:sldId id="258"/>
+          </p14:sldIdLst>
+        </p14:section>
+        <p14:section name="Superscalar processors" id="{f0f58b47-892e-8d89-bd46-bed0b2843706}">
+          <p14:sldIdLst>
             <p14:sldId id="259"/>
             <p14:sldId id="260"/>
+          </p14:sldIdLst>
+        </p14:section>
+        <p14:section name="Vectors: one instruction, many data" id="{705cb46c-3224-479e-b378-6185a91b5192}">
+          <p14:sldIdLst>
             <p14:sldId id="261"/>
             <p14:sldId id="262"/>
+          </p14:sldIdLst>
+        </p14:section>
+        <p14:section name="GPU accelerators" id="{593e353b-041a-ec31-ece5-e21954c74f1e}">
+          <p14:sldIdLst>
             <p14:sldId id="263"/>
+          </p14:sldIdLst>
+        </p14:section>
+        <p14:section name="FPGA accelerators" id="{296b3a3f-16da-5666-a1af-8f8085d6dace}">
+          <p14:sldIdLst>
             <p14:sldId id="264"/>
+          </p14:sldIdLst>
+        </p14:section>
+        <p14:section name="Back to the machine" id="{8bd15fd4-ecf2-aeb3-1afb-9fb00cd18b72}">
+          <p14:sldIdLst>
             <p14:sldId id="265"/>
           </p14:sldIdLst>
         </p14:section>
-        <p14:section name="The complete program" id="{8087254e-1335-1202-5d11-17f2faabe06a}">
+        <p14:section name="The complete program" id="{664a1e07-7f97-ef67-ebe8-4cdbd77886fa}">
           <p14:sldIdLst>
             <p14:sldId id="266"/>
             <p14:sldId id="267"/>
@@ -153,7 +173,7 @@
             <p14:sldId id="269"/>
           </p14:sldIdLst>
         </p14:section>
-        <p14:section name="Run it and test it" id="{9ed617b5-f22b-f4e7-21a7-b26e64d924dc}">
+        <p14:section name="Run it and test it" id="{a0f335ac-bd4c-dd07-a21b-00267abf0e04}">
           <p14:sldIdLst>
             <p14:sldId id="270"/>
             <p14:sldId id="271"/>
@@ -163,7 +183,7 @@
             <p14:sldId id="275"/>
           </p14:sldIdLst>
         </p14:section>
-        <p14:section name="Exercises" id="{72abda34-7f13-edb3-e993-1eb3dbf48d3c}">
+        <p14:section name="Exercises" id="{e22a14f3-40a5-f8eb-df1a-f30010c0790c}">
           <p14:sldIdLst>
             <p14:sldId id="276"/>
           </p14:sldIdLst>
@@ -3206,7 +3226,7 @@
                 <a:ea typeface="Cambria" pitchFamily="34" charset="-122"/>
                 <a:cs typeface="Cambria" pitchFamily="34" charset="-120"/>
               </a:rPr>
-              <a:t>Beyond One Core: Superscalar RISC-V, HPC, GPUs and FPGAs: the code</a:t>
+              <a:t>Beyond One Core: Superscalar RISC‑V, HPC, GPUs and FPGAs: the code</a:t>
             </a:r>
             <a:endParaRPr lang="en-US" sz="3900" dirty="0"/>
           </a:p>
@@ -3326,7 +3346,63 @@
       </p:sp>
       <p:sp>
         <p:nvSpPr>
-          <p:cNvPr id="11" name="Shape 9"/>
+          <p:cNvPr id="11" name="Text 9"/>
+          <p:cNvSpPr txBox="1"/>
+          <p:nvPr/>
+        </p:nvSpPr>
+        <p:spPr>
+          <a:xfrm>
+            <a:off x="4693615" y="566928"/>
+            <a:ext cx="6949440" cy="640080"/>
+          </a:xfrm>
+          <a:prstGeom prst="rect">
+            <a:avLst/>
+          </a:prstGeom>
+          <a:noFill/>
+          <a:ln/>
+        </p:spPr>
+        <p:txBody>
+          <a:bodyPr wrap="square" lIns="0" tIns="0" rIns="0" bIns="0" rtlCol="0" anchor="t"/>
+          <a:lstStyle/>
+          <a:p>
+            <a:pPr algn="r" indent="0" marL="0">
+              <a:buNone/>
+            </a:pPr>
+            <a:r>
+              <a:rPr lang="en-US" sz="1300" dirty="0">
+                <a:solidFill>
+                  <a:srgbClr val="CFE3EA"/>
+                </a:solidFill>
+                <a:latin typeface="Calibri" pitchFamily="34" charset="0"/>
+                <a:ea typeface="Calibri" pitchFamily="34" charset="-122"/>
+                <a:cs typeface="Calibri" pitchFamily="34" charset="-120"/>
+              </a:rPr>
+              <a:t>Code deck. The concepts, the figures and the questions are in the lecture deck:</a:t>
+            </a:r>
+            <a:endParaRPr lang="en-US" sz="1300" dirty="0"/>
+          </a:p>
+          <a:p>
+            <a:pPr algn="r" indent="0" marL="0">
+              <a:buNone/>
+            </a:pPr>
+            <a:r>
+              <a:rPr lang="en-US" sz="1300" dirty="0">
+                <a:solidFill>
+                  <a:srgbClr val="CFE3EA"/>
+                </a:solidFill>
+                <a:latin typeface="Calibri" pitchFamily="34" charset="0"/>
+                <a:ea typeface="Calibri" pitchFamily="34" charset="-122"/>
+                <a:cs typeface="Calibri" pitchFamily="34" charset="-120"/>
+              </a:rPr>
+              <a:t>24-Computer_Architecture-Superscalar_HPC_GPU_FPGA.pptx</a:t>
+            </a:r>
+            <a:endParaRPr lang="en-US" sz="1300" dirty="0"/>
+          </a:p>
+        </p:txBody>
+      </p:sp>
+      <p:sp>
+        <p:nvSpPr>
+          <p:cNvPr id="12" name="Shape 10"/>
           <p:cNvSpPr/>
           <p:nvPr/>
         </p:nvSpPr>
@@ -3353,7 +3429,7 @@
       </p:sp>
       <p:pic>
         <p:nvPicPr>
-          <p:cNvPr id="12" name="Image 0" descr="/Users/raffaelemontella/devel/riscv-prg32/computer-architecture-with-prg32/tools/assets/cluster_1.jpg">    </p:cNvPr>
+          <p:cNvPr id="13" name="Image 0" descr="/Users/raffaelemontella/devel/riscv-prg32/computer-architecture-with-prg32/tools/assets/rcf_cluster.jpg">    </p:cNvPr>
           <p:cNvPicPr>
             <a:picLocks noChangeAspect="1"/>
           </p:cNvPicPr>
@@ -3367,8 +3443,8 @@
         </p:blipFill>
         <p:spPr>
           <a:xfrm>
-            <a:off x="8915095" y="4251960"/>
-            <a:ext cx="2438400" cy="1828800"/>
+            <a:off x="8716975" y="4686243"/>
+            <a:ext cx="2834640" cy="960234"/>
           </a:xfrm>
           <a:prstGeom prst="rect">
             <a:avLst/>

--- a/en/slides/24-Computer_Architecture-Superscalar_HPC_GPU_FPGA-Code.pptx
+++ b/en/slides/24-Computer_Architecture-Superscalar_HPC_GPU_FPGA-Code.pptx
@@ -127,45 +127,45 @@
   <p:extLst>
     <p:ext uri="{521415D9-36F7-43E2-AB2F-B90AF26B5E84}">
       <p14:sectionLst xmlns:p14="http://schemas.microsoft.com/office/powerpoint/2010/main">
-        <p14:section name="Opening" id="{21f478a5-9c34-f0c0-df6f-8d993d9837e9}">
+        <p14:section name="Opening" id="{48c22e0b-099c-4553-1989-414a3da7aa98}">
           <p14:sldIdLst>
             <p14:sldId id="256"/>
             <p14:sldId id="257"/>
           </p14:sldIdLst>
         </p14:section>
-        <p14:section name="Warm-up on the machine" id="{133957aa-7672-48e3-efb6-0b5355f5c776}">
+        <p14:section name="Warm-up on the machine" id="{6032f17c-6d24-b45a-0962-58e4af6fd59d}">
           <p14:sldIdLst>
             <p14:sldId id="258"/>
           </p14:sldIdLst>
         </p14:section>
-        <p14:section name="Superscalar processors" id="{f0f58b47-892e-8d89-bd46-bed0b2843706}">
+        <p14:section name="Superscalar processors" id="{c8ff6d58-4028-4b68-beaa-a1abae835313}">
           <p14:sldIdLst>
             <p14:sldId id="259"/>
             <p14:sldId id="260"/>
           </p14:sldIdLst>
         </p14:section>
-        <p14:section name="Vectors: one instruction, many data" id="{705cb46c-3224-479e-b378-6185a91b5192}">
+        <p14:section name="Vectors: one instruction, many data" id="{dd6b2070-c5f9-5894-7d94-e10cbbd991aa}">
           <p14:sldIdLst>
             <p14:sldId id="261"/>
             <p14:sldId id="262"/>
           </p14:sldIdLst>
         </p14:section>
-        <p14:section name="GPU accelerators" id="{593e353b-041a-ec31-ece5-e21954c74f1e}">
+        <p14:section name="GPU accelerators" id="{2215c1e3-6c2d-f046-bf56-84cfa1b55a65}">
           <p14:sldIdLst>
             <p14:sldId id="263"/>
           </p14:sldIdLst>
         </p14:section>
-        <p14:section name="FPGA accelerators" id="{296b3a3f-16da-5666-a1af-8f8085d6dace}">
+        <p14:section name="FPGA accelerators" id="{28653c5a-9b91-95b2-1ff5-48027c1c82d5}">
           <p14:sldIdLst>
             <p14:sldId id="264"/>
           </p14:sldIdLst>
         </p14:section>
-        <p14:section name="Back to the machine" id="{8bd15fd4-ecf2-aeb3-1afb-9fb00cd18b72}">
+        <p14:section name="Back to the machine" id="{a562855b-89fd-4fa7-9564-48809ab0fdd8}">
           <p14:sldIdLst>
             <p14:sldId id="265"/>
           </p14:sldIdLst>
         </p14:section>
-        <p14:section name="The complete program" id="{664a1e07-7f97-ef67-ebe8-4cdbd77886fa}">
+        <p14:section name="The complete program" id="{9c6912db-3c5b-e800-a6e8-2517235ba472}">
           <p14:sldIdLst>
             <p14:sldId id="266"/>
             <p14:sldId id="267"/>
@@ -173,7 +173,7 @@
             <p14:sldId id="269"/>
           </p14:sldIdLst>
         </p14:section>
-        <p14:section name="Run it and test it" id="{a0f335ac-bd4c-dd07-a21b-00267abf0e04}">
+        <p14:section name="Run it and test it" id="{8ad9666b-f574-f9c8-13ac-6515153dbb71}">
           <p14:sldIdLst>
             <p14:sldId id="270"/>
             <p14:sldId id="271"/>
@@ -183,7 +183,7 @@
             <p14:sldId id="275"/>
           </p14:sldIdLst>
         </p14:section>
-        <p14:section name="Exercises" id="{e22a14f3-40a5-f8eb-df1a-f30010c0790c}">
+        <p14:section name="Exercises" id="{aa1bcbfe-6b06-78d8-7a2b-51c2e4b5b063}">
           <p14:sldIdLst>
             <p14:sldId id="276"/>
           </p14:sldIdLst>
@@ -592,7 +592,9 @@
           <a:p>
             <a:r>
               <a:rPr lang="en-US" dirty="0"/>
-              <a:t>This is the code deck of Lecture 24. The lecture deck holds the concepts; this one holds everything you type and run: the listings with their explanation, the complete program, what it shows, and the way to test it on each of the three hosts.</a:t>
+              <a:t>This is the code deck of Lecture 24. The lecture deck holds the concepts; this one holds everything you type and run: the listings with their explanation, the complete program, what it shows, and the way to test it on each of the three hosts.
+Learning status: UNDERSTAND NOW, by the end of this lecture you explain it, trace it and apply it on your own; USE NOW, you follow and use the recipe today; how it works inside is explained later, or is not part of the course; UNDERSTAND LATER, recognise the name and what it is for; a later lecture explains it. A slide without a badge is context: a story, an example, a question, an exercise.
+Learning status of this lecture. UNDERSTAND NOW: the performance equation; superscalar processors; vector instructions; HPC and Amdahl's law; GPU and FPGA accelerators. USE NOW: the complete program, the PRG32 tools (used, not studied, in this course). UNDERSTAND LATER: nothing. A slide without a badge is context: a story, an example, a question, an exercise.</a:t>
             </a:r>
             <a:endParaRPr lang="en-US" dirty="0"/>
           </a:p>
@@ -681,6 +683,7 @@
             <a:r>
               <a:rPr lang="en-US" dirty="0"/>
               <a:t>Emptying the 960 cells of the map. On the kit: one byte per turn, 3,840 cycles. On an out-of-order RISC-V core: the same binary, in a fraction of those cycles. With 128-bit vectors: 60 turns. On a GPU: one launch of 960 threads, plus two copies. On an FPGA: 960 flip-flops with a common reset, one clock cycle. The work is the same; what changes is how much of it happens at the same time, and what it costs to obtain it. The engineer's question is not which is fastest, but which is enough.
+UNDERSTAND NOW: GPU and FPGA accelerators.
 For the lecturer: The work is the same; what changes is how much of it happens at the same time. And the costs: the first row needs a two-euro chip and four lines of assembly; the last needs a hardware design. The engineer's question is never which is fastest, but which is enough.</a:t>
             </a:r>
             <a:endParaRPr lang="en-US" dirty="0"/>
@@ -770,6 +773,7 @@
             <a:r>
               <a:rPr lang="en-US" dirty="0"/>
               <a:t>One page of the complete program, exactly as it is in the repository. Read it from the top: the header says what the program shows and how to build it; the three functions init, update and draw follow, then the data. Lines that you met in the listings of the lecture have the same comments here.
+USE NOW: the complete program (used, not studied, in this course).
 For the lecturer: code/l24.S, as built and run by the tests. The comments are part of the program: read them with the code.</a:t>
             </a:r>
             <a:endParaRPr lang="en-US" dirty="0"/>
@@ -859,6 +863,7 @@
             <a:r>
               <a:rPr lang="en-US" dirty="0"/>
               <a:t>One page of the complete program, exactly as it is in the repository. Read it from the top: the header says what the program shows and how to build it; the three functions init, update and draw follow, then the data. Lines that you met in the listings of the lecture have the same comments here.
+USE NOW: the complete program (used, not studied, in this course).
 For the lecturer: code/l24.S, as built and run by the tests. The comments are part of the program: read them with the code.</a:t>
             </a:r>
             <a:endParaRPr lang="en-US" dirty="0"/>
@@ -948,6 +953,7 @@
             <a:r>
               <a:rPr lang="en-US" dirty="0"/>
               <a:t>One page of the complete program, exactly as it is in the repository. Read it from the top: the header says what the program shows and how to build it; the three functions init, update and draw follow, then the data. Lines that you met in the listings of the lecture have the same comments here.
+USE NOW: the complete program (used, not studied, in this course).
 For the lecturer: code/l24.S, as built and run by the tests. The comments are part of the program: read them with the code.</a:t>
             </a:r>
             <a:endParaRPr lang="en-US" dirty="0"/>
@@ -1037,6 +1043,7 @@
             <a:r>
               <a:rPr lang="en-US" dirty="0"/>
               <a:t>One page of the complete program, exactly as it is in the repository. Read it from the top: the header says what the program shows and how to build it; the three functions init, update and draw follow, then the data. Lines that you met in the listings of the lecture have the same comments here.
+USE NOW: the complete program (used, not studied, in this course).
 For the lecturer: code/l24.S, as built and run by the tests. The comments are part of the program: read them with the code.</a:t>
             </a:r>
             <a:endParaRPr lang="en-US" dirty="0"/>
@@ -1215,6 +1222,7 @@
             <a:r>
               <a:rPr lang="en-US" dirty="0"/>
               <a:t>The quickest way: PRG32-QT on your own computer. Four steps, each with its command. PRG32-QT behaves like a board on port 8080, which is why the upload command says esp32c6. With debug mode enabled you can stop at any instruction and read registers and memory.
+USE NOW: the PRG32 tools (used, not studied, in this course).
 For the lecturer: Run by the tests: the cartridge of this slide is built with this command and executed on the headless runner of PRG32-QT. Without the toolchain: import the .prg32 file in PRG32-QT and choose Run Cartridge. Keys: arrows or WASD for the joystick, Z or J for A, X or K for B, Enter for Start, Escape to go back to Setup.</a:t>
             </a:r>
             <a:endParaRPr lang="en-US" dirty="0"/>
@@ -1304,6 +1312,7 @@
             <a:r>
               <a:rPr lang="en-US" dirty="0"/>
               <a:t>The same program on the emulator. QEMU runs the real firmware on an emulated chip, so the cartridge must be built for the architecture qemu. Stage the cartridge while QEMU is closed. The firmware opens on the Setup menu: choose Run Cartridge and the slot. Remember that the keyboard is read by the terminal, not by the window with the picture.
+USE NOW: the PRG32 tools (used, not studied, in this course).
 For the lecturer: Checked by the tests up to the staging: the cartridge is built for the architecture qemu and accepted into the flash image of the emulator. What the emulator then shows is not checked automatically: Espressif QEMU needs its window. Since October 2026 the firmware starts on Setup: choose Run Cartridge, then cart0.</a:t>
             </a:r>
             <a:endParaRPr lang="en-US" dirty="0"/>
@@ -1393,6 +1402,7 @@
             <a:r>
               <a:rPr lang="en-US" dirty="0"/>
               <a:t>The same program on the kit. The firmware is written once, through USB; after that cartridges travel over Wi-Fi. The upload command is the one used for PRG32-QT with the address of the board. This is the only host that the automatic tests do not run: try it, and report what you see.
+USE NOW: the PRG32 tools (used, not studied, in this course).
 For the lecturer: Not run by the tests: there is no board on the test machine. The cartridge for the architecture esp32c6 is built by the tests; the steps are those of the PRG32 documentation. If the serial port is not found pass it explicitly. To use the Wi-Fi of the classroom: python3 -m prg32 wifi set --ssid NAME --password PASSWORD --mode sta.</a:t>
             </a:r>
             <a:endParaRPr lang="en-US" dirty="0"/>
@@ -1482,6 +1492,7 @@
             <a:r>
               <a:rPr lang="en-US" dirty="0"/>
               <a:t>The vector listings of this lecture cannot run on the kit, whose processor has no V extension. They are tested on a bare emulated processor instead: the commands build one binary and run it with four vector lengths. The exit code is the result.
+USE NOW: the PRG32 tools (used, not studied, in this course).
 For the lecturer: Run by the tests (tools/tests/run_all.sh, step vectors). On macOS there is no timeout command: if a listing loops for ever, stop QEMU with Ctrl-A X.</a:t>
             </a:r>
             <a:endParaRPr lang="en-US" dirty="0"/>
@@ -1660,6 +1671,7 @@
             <a:r>
               <a:rPr lang="en-US" dirty="0"/>
               <a:t>The five most common symptoms, what each means, and what to do. Read the message before changing anything: it nearly always names the cause.
+USE NOW: the PRG32 tools (used, not studied, in this course).
 For the lecturer: The first three rows cover most cases. When asking for help, paste the command and the whole message as text. docs/usage/troubleshooting.md of the PRG32 repository has the complete list.</a:t>
             </a:r>
             <a:endParaRPr lang="en-US" dirty="0"/>
@@ -1838,6 +1850,7 @@
             <a:r>
               <a:rPr lang="en-US" dirty="0"/>
               <a:t>The loop that empties the map in new_game: 960 bytes set to zero. Four instructions per turn: a store of one byte, the increment of the address, the decrement of the counter, the branch back. In all 3,840 instructions, one byte at a time, one instruction at a time. On the kit it takes about 24 microseconds, and nobody needs it faster. It is chosen because it is small enough to be followed onto every machine of today. In how many ways can it be made faster?
+UNDERSTAND NOW: the performance equation.
 For the lecturer: The processor cycle of Lecture 19. At best one instruction per clock cycle, and 160 million cycles per second on the kit: about 24 microseconds. Nobody needs this loop to be faster; it is small enough to follow onto every machine of today.</a:t>
             </a:r>
             <a:endParaRPr lang="en-US" dirty="0"/>
@@ -1927,6 +1940,7 @@
             <a:r>
               <a:rPr lang="en-US" dirty="0"/>
               <a:t>What gets in the way. The second instruction uses t0, which the first is still computing: it cannot run beside it. This is a data dependence. The third depends on nobody, and yet in an in-order processor it waits behind the second. The fourth is a branch: until it is resolved the processor does not know whether the fifth must be executed. This is a control dependence. Real programs are full of such chains, so width alone is not enough.
+UNDERSTAND NOW: superscalar processors.
 For the lecturer: Data dependences, control dependences. An in-order superscalar stalls at i2 and everything behind it waits. The remedy is to let i3 overtake.</a:t>
             </a:r>
             <a:endParaRPr lang="en-US" dirty="0"/>
@@ -2016,6 +2030,7 @@
             <a:r>
               <a:rPr lang="en-US" dirty="0"/>
               <a:t>Register renaming on an example. On the left the code as written: two halves, each loading a word, incrementing it and storing it back, and both using t0. The second half reuses the name, not the value: it is a false dependence. On the right, after renaming, each new value has its own physical register, and the two halves share nothing, so they can execute at the same time. The thirty-two registers you know are names; the chip has a few hundred registers.
+UNDERSTAND NOW: superscalar processors.
 For the lecturer: A false dependence: the same name for two unrelated values. p41 to p44 are invented numbers of physical registers. A big core has a few hundred of them.</a:t>
             </a:r>
             <a:endParaRPr lang="en-US" dirty="0"/>
@@ -2105,6 +2120,7 @@
             <a:r>
               <a:rPr lang="en-US" dirty="0"/>
               <a:t>The same loop with the vector extension. v0 is a vector register, many bytes wide, filled with zeros. In each turn vsetvli asks: of the bytes still to do, how many fit in a register? The answer goes in t2. vse8.v stores that many bytes with a single instruction, and the address and the counter advance by t2. With 128-bit registers a turn handles 16 bytes: 60 turns instead of 960. The code never states the width of the registers, so the same program works with any width.
+UNDERSTAND NOW: vector instructions.
 For the lecturer: The V extension, ratified in 2021. Not on the kit: the ESP32-C6 is RV32IMAC. The code never says how wide the registers are: it is vector-length agnostic, and the same binary uses 128, 256 or 1024 bits. Tested on QEMU at 128, 256, 512 and 1024 bits by tools/tests/vector_qemu.S.</a:t>
             </a:r>
             <a:endParaRPr lang="en-US" dirty="0"/>
@@ -2194,6 +2210,7 @@
             <a:r>
               <a:rPr lang="en-US" dirty="0"/>
               <a:t>A sum, lane by lane. A vector register holds several words, each in its own lane. vle32.v loads several words at once; vadd.vv adds two registers lane by lane, so that v1 accumulates as many partial sums as there are lanes. At the end vredsum adds the lanes together into one number. With the sixteen numbers from 1 to 16 the result is 136. It is the parallel sum you saw as a picture in Lecture 04, now as instructions.
+UNDERSTAND NOW: vector instructions.
 For the lecturer: The parallel sum of Lectures 04 and 20, in RISC-V. tu, tail undisturbed, keeps the partial sums of the lanes that the last turn does not use. Tested on QEMU together with the previous listing.</a:t>
             </a:r>
             <a:endParaRPr lang="en-US" dirty="0"/>
@@ -2283,6 +2300,7 @@
             <a:r>
               <a:rPr lang="en-US" dirty="0"/>
               <a:t>The map of Verm1 on a GPU. The function marked as kernel runs once in every thread. Each thread first computes who it is, its index i, from the number of its block and its position in the block; then, if the index is inside the map, it clears its own cell. There is no loop: there are 960 threads. The last line, on the host, launches four blocks of 256 threads. For 960 bytes the two copies cost far more than the work: this example shows the form, not a gain.
+UNDERSTAND NOW: GPU and FPGA accelerators.
 For the lecturer: CUDA C, in its usual textbook form; not compiled for these slides. The point of the last callout is serious: a GPU pays off when the data are large and the work per element is real. Ask: for which size of map would it be worth it?</a:t>
             </a:r>
             <a:endParaRPr lang="en-US" dirty="0"/>
@@ -2372,6 +2390,7 @@
             <a:r>
               <a:rPr lang="en-US" dirty="0"/>
               <a:t>The rule of Verm1 that forbids the U-turn, written as hardware. Verilog is a language that describes circuits, not sequences of steps. The module has two inputs of two bits, the current direction and the one requested, and one output. The line with assign is a wire that is always true: the output is 1 when the XOR of the two directions equals binary 10. There is no before and after. On the kit the same rule took three instructions.
+UNDERSTAND NOW: GPU and FPGA accelerators.
 For the lecturer: A hardware description language: Verilog, or VHDL. Not synthesised for these slides. The xor, li, beq of Part 2 become gates that answer in a fraction of a nanosecond, continuously. Ask the students to draw the circuit: refuse = (d1 xor w1) and not (d0 xor w0).</a:t>
             </a:r>
             <a:endParaRPr lang="en-US" dirty="0"/>
@@ -3451,6 +3470,420 @@
           </a:prstGeom>
         </p:spPr>
       </p:pic>
+      <p:sp>
+        <p:nvSpPr>
+          <p:cNvPr id="14" name="Shape 11"/>
+          <p:cNvSpPr/>
+          <p:nvPr/>
+        </p:nvSpPr>
+        <p:spPr>
+          <a:xfrm>
+            <a:off x="9690303" y="91440"/>
+            <a:ext cx="1952752" cy="274320"/>
+          </a:xfrm>
+          <a:prstGeom prst="rect">
+            <a:avLst/>
+          </a:prstGeom>
+          <a:solidFill>
+            <a:srgbClr val="F3E8FF"/>
+          </a:solidFill>
+          <a:ln w="12700">
+            <a:solidFill>
+              <a:srgbClr val="7E22CE"/>
+            </a:solidFill>
+            <a:prstDash val="dash"/>
+          </a:ln>
+        </p:spPr>
+      </p:sp>
+      <p:sp>
+        <p:nvSpPr>
+          <p:cNvPr id="15" name="Shape 12"/>
+          <p:cNvSpPr/>
+          <p:nvPr/>
+        </p:nvSpPr>
+        <p:spPr>
+          <a:xfrm>
+            <a:off x="9717735" y="128016"/>
+            <a:ext cx="45720" cy="45720"/>
+          </a:xfrm>
+          <a:prstGeom prst="rect">
+            <a:avLst/>
+          </a:prstGeom>
+          <a:solidFill>
+            <a:srgbClr val="7E22CE"/>
+          </a:solidFill>
+          <a:ln w="12700">
+            <a:solidFill>
+              <a:srgbClr val="7E22CE"/>
+            </a:solidFill>
+            <a:prstDash val="solid"/>
+          </a:ln>
+        </p:spPr>
+      </p:sp>
+      <p:sp>
+        <p:nvSpPr>
+          <p:cNvPr id="16" name="Shape 13"/>
+          <p:cNvSpPr/>
+          <p:nvPr/>
+        </p:nvSpPr>
+        <p:spPr>
+          <a:xfrm>
+            <a:off x="9717735" y="205740"/>
+            <a:ext cx="45720" cy="45720"/>
+          </a:xfrm>
+          <a:prstGeom prst="rect">
+            <a:avLst/>
+          </a:prstGeom>
+          <a:solidFill>
+            <a:srgbClr val="7E22CE"/>
+          </a:solidFill>
+          <a:ln w="12700">
+            <a:solidFill>
+              <a:srgbClr val="7E22CE"/>
+            </a:solidFill>
+            <a:prstDash val="solid"/>
+          </a:ln>
+        </p:spPr>
+      </p:sp>
+      <p:sp>
+        <p:nvSpPr>
+          <p:cNvPr id="17" name="Shape 14"/>
+          <p:cNvSpPr/>
+          <p:nvPr/>
+        </p:nvSpPr>
+        <p:spPr>
+          <a:xfrm>
+            <a:off x="9717735" y="283464"/>
+            <a:ext cx="45720" cy="45720"/>
+          </a:xfrm>
+          <a:prstGeom prst="rect">
+            <a:avLst/>
+          </a:prstGeom>
+          <a:solidFill>
+            <a:srgbClr val="7E22CE"/>
+          </a:solidFill>
+          <a:ln w="12700">
+            <a:solidFill>
+              <a:srgbClr val="7E22CE"/>
+            </a:solidFill>
+            <a:prstDash val="solid"/>
+          </a:ln>
+        </p:spPr>
+      </p:sp>
+      <p:pic>
+        <p:nvPicPr>
+          <p:cNvPr id="18" name="Image 1" descr="preencoded.png">    </p:cNvPr>
+          <p:cNvPicPr>
+            <a:picLocks noChangeAspect="1"/>
+          </p:cNvPicPr>
+          <p:nvPr/>
+        </p:nvPicPr>
+        <p:blipFill>
+          <a:blip r:embed="rId2"/>
+          <a:stretch>
+            <a:fillRect/>
+          </a:stretch>
+        </p:blipFill>
+        <p:spPr>
+          <a:xfrm>
+            <a:off x="9818319" y="128016"/>
+            <a:ext cx="201168" cy="201168"/>
+          </a:xfrm>
+          <a:prstGeom prst="rect">
+            <a:avLst/>
+          </a:prstGeom>
+        </p:spPr>
+      </p:pic>
+      <p:sp>
+        <p:nvSpPr>
+          <p:cNvPr id="19" name="Text 15"/>
+          <p:cNvSpPr txBox="1"/>
+          <p:nvPr/>
+        </p:nvSpPr>
+        <p:spPr>
+          <a:xfrm>
+            <a:off x="10074351" y="91440"/>
+            <a:ext cx="1532128" cy="274320"/>
+          </a:xfrm>
+          <a:prstGeom prst="rect">
+            <a:avLst/>
+          </a:prstGeom>
+          <a:noFill/>
+          <a:ln/>
+        </p:spPr>
+        <p:txBody>
+          <a:bodyPr wrap="square" lIns="0" tIns="0" rIns="0" bIns="0" rtlCol="0" anchor="ctr"/>
+          <a:lstStyle/>
+          <a:p>
+            <a:pPr indent="0" marL="0">
+              <a:buNone/>
+            </a:pPr>
+            <a:r>
+              <a:rPr lang="en-US" sz="1100" b="1" dirty="0">
+                <a:solidFill>
+                  <a:srgbClr val="6B21A8"/>
+                </a:solidFill>
+                <a:latin typeface="Calibri" pitchFamily="34" charset="0"/>
+                <a:ea typeface="Calibri" pitchFamily="34" charset="-122"/>
+                <a:cs typeface="Calibri" pitchFamily="34" charset="-120"/>
+              </a:rPr>
+              <a:t>UNDERSTAND LATER</a:t>
+            </a:r>
+            <a:endParaRPr lang="en-US" sz="1100" dirty="0"/>
+          </a:p>
+        </p:txBody>
+      </p:sp>
+      <p:sp>
+        <p:nvSpPr>
+          <p:cNvPr id="20" name="Shape 16"/>
+          <p:cNvSpPr/>
+          <p:nvPr/>
+        </p:nvSpPr>
+        <p:spPr>
+          <a:xfrm>
+            <a:off x="8407349" y="91440"/>
+            <a:ext cx="1173226" cy="274320"/>
+          </a:xfrm>
+          <a:prstGeom prst="rect">
+            <a:avLst/>
+          </a:prstGeom>
+          <a:solidFill>
+            <a:srgbClr val="FEF3C7"/>
+          </a:solidFill>
+          <a:ln w="12700">
+            <a:solidFill>
+              <a:srgbClr val="B45309"/>
+            </a:solidFill>
+            <a:prstDash val="solid"/>
+          </a:ln>
+        </p:spPr>
+      </p:sp>
+      <p:sp>
+        <p:nvSpPr>
+          <p:cNvPr id="21" name="Shape 17"/>
+          <p:cNvSpPr/>
+          <p:nvPr/>
+        </p:nvSpPr>
+        <p:spPr>
+          <a:xfrm>
+            <a:off x="8407349" y="91440"/>
+            <a:ext cx="27432" cy="274320"/>
+          </a:xfrm>
+          <a:prstGeom prst="rect">
+            <a:avLst/>
+          </a:prstGeom>
+          <a:solidFill>
+            <a:srgbClr val="B45309"/>
+          </a:solidFill>
+          <a:ln w="12700">
+            <a:solidFill>
+              <a:srgbClr val="B45309"/>
+            </a:solidFill>
+            <a:prstDash val="solid"/>
+          </a:ln>
+        </p:spPr>
+      </p:sp>
+      <p:sp>
+        <p:nvSpPr>
+          <p:cNvPr id="22" name="Shape 18"/>
+          <p:cNvSpPr/>
+          <p:nvPr/>
+        </p:nvSpPr>
+        <p:spPr>
+          <a:xfrm>
+            <a:off x="8462213" y="91440"/>
+            <a:ext cx="27432" cy="274320"/>
+          </a:xfrm>
+          <a:prstGeom prst="rect">
+            <a:avLst/>
+          </a:prstGeom>
+          <a:solidFill>
+            <a:srgbClr val="B45309"/>
+          </a:solidFill>
+          <a:ln w="12700">
+            <a:solidFill>
+              <a:srgbClr val="B45309"/>
+            </a:solidFill>
+            <a:prstDash val="solid"/>
+          </a:ln>
+        </p:spPr>
+      </p:sp>
+      <p:pic>
+        <p:nvPicPr>
+          <p:cNvPr id="23" name="Image 2" descr="preencoded.png">    </p:cNvPr>
+          <p:cNvPicPr>
+            <a:picLocks noChangeAspect="1"/>
+          </p:cNvPicPr>
+          <p:nvPr/>
+        </p:nvPicPr>
+        <p:blipFill>
+          <a:blip r:embed="rId3"/>
+          <a:stretch>
+            <a:fillRect/>
+          </a:stretch>
+        </p:blipFill>
+        <p:spPr>
+          <a:xfrm>
+            <a:off x="8535365" y="128016"/>
+            <a:ext cx="201168" cy="201168"/>
+          </a:xfrm>
+          <a:prstGeom prst="rect">
+            <a:avLst/>
+          </a:prstGeom>
+        </p:spPr>
+      </p:pic>
+      <p:sp>
+        <p:nvSpPr>
+          <p:cNvPr id="24" name="Text 19"/>
+          <p:cNvSpPr txBox="1"/>
+          <p:nvPr/>
+        </p:nvSpPr>
+        <p:spPr>
+          <a:xfrm>
+            <a:off x="8791397" y="91440"/>
+            <a:ext cx="752602" cy="274320"/>
+          </a:xfrm>
+          <a:prstGeom prst="rect">
+            <a:avLst/>
+          </a:prstGeom>
+          <a:noFill/>
+          <a:ln/>
+        </p:spPr>
+        <p:txBody>
+          <a:bodyPr wrap="square" lIns="0" tIns="0" rIns="0" bIns="0" rtlCol="0" anchor="ctr"/>
+          <a:lstStyle/>
+          <a:p>
+            <a:pPr indent="0" marL="0">
+              <a:buNone/>
+            </a:pPr>
+            <a:r>
+              <a:rPr lang="en-US" sz="1100" b="1" dirty="0">
+                <a:solidFill>
+                  <a:srgbClr val="92400E"/>
+                </a:solidFill>
+                <a:latin typeface="Calibri" pitchFamily="34" charset="0"/>
+                <a:ea typeface="Calibri" pitchFamily="34" charset="-122"/>
+                <a:cs typeface="Calibri" pitchFamily="34" charset="-120"/>
+              </a:rPr>
+              <a:t>USE NOW</a:t>
+            </a:r>
+            <a:endParaRPr lang="en-US" sz="1100" dirty="0"/>
+          </a:p>
+        </p:txBody>
+      </p:sp>
+      <p:sp>
+        <p:nvSpPr>
+          <p:cNvPr id="25" name="Shape 20"/>
+          <p:cNvSpPr/>
+          <p:nvPr/>
+        </p:nvSpPr>
+        <p:spPr>
+          <a:xfrm>
+            <a:off x="6518097" y="91440"/>
+            <a:ext cx="1779524" cy="274320"/>
+          </a:xfrm>
+          <a:prstGeom prst="rect">
+            <a:avLst/>
+          </a:prstGeom>
+          <a:solidFill>
+            <a:srgbClr val="E0F2FE"/>
+          </a:solidFill>
+          <a:ln w="12700">
+            <a:solidFill>
+              <a:srgbClr val="0369A1"/>
+            </a:solidFill>
+            <a:prstDash val="solid"/>
+          </a:ln>
+        </p:spPr>
+      </p:sp>
+      <p:sp>
+        <p:nvSpPr>
+          <p:cNvPr id="26" name="Shape 21"/>
+          <p:cNvSpPr/>
+          <p:nvPr/>
+        </p:nvSpPr>
+        <p:spPr>
+          <a:xfrm>
+            <a:off x="6518097" y="91440"/>
+            <a:ext cx="73152" cy="274320"/>
+          </a:xfrm>
+          <a:prstGeom prst="rect">
+            <a:avLst/>
+          </a:prstGeom>
+          <a:solidFill>
+            <a:srgbClr val="0369A1"/>
+          </a:solidFill>
+          <a:ln w="12700">
+            <a:solidFill>
+              <a:srgbClr val="0369A1"/>
+            </a:solidFill>
+            <a:prstDash val="solid"/>
+          </a:ln>
+        </p:spPr>
+      </p:sp>
+      <p:pic>
+        <p:nvPicPr>
+          <p:cNvPr id="27" name="Image 3" descr="preencoded.png">    </p:cNvPr>
+          <p:cNvPicPr>
+            <a:picLocks noChangeAspect="1"/>
+          </p:cNvPicPr>
+          <p:nvPr/>
+        </p:nvPicPr>
+        <p:blipFill>
+          <a:blip r:embed="rId4"/>
+          <a:stretch>
+            <a:fillRect/>
+          </a:stretch>
+        </p:blipFill>
+        <p:spPr>
+          <a:xfrm>
+            <a:off x="6646113" y="128016"/>
+            <a:ext cx="201168" cy="201168"/>
+          </a:xfrm>
+          <a:prstGeom prst="rect">
+            <a:avLst/>
+          </a:prstGeom>
+        </p:spPr>
+      </p:pic>
+      <p:sp>
+        <p:nvSpPr>
+          <p:cNvPr id="28" name="Text 22"/>
+          <p:cNvSpPr txBox="1"/>
+          <p:nvPr/>
+        </p:nvSpPr>
+        <p:spPr>
+          <a:xfrm>
+            <a:off x="6902145" y="91440"/>
+            <a:ext cx="1358900" cy="274320"/>
+          </a:xfrm>
+          <a:prstGeom prst="rect">
+            <a:avLst/>
+          </a:prstGeom>
+          <a:noFill/>
+          <a:ln/>
+        </p:spPr>
+        <p:txBody>
+          <a:bodyPr wrap="square" lIns="0" tIns="0" rIns="0" bIns="0" rtlCol="0" anchor="ctr"/>
+          <a:lstStyle/>
+          <a:p>
+            <a:pPr indent="0" marL="0">
+              <a:buNone/>
+            </a:pPr>
+            <a:r>
+              <a:rPr lang="en-US" sz="1100" b="1" dirty="0">
+                <a:solidFill>
+                  <a:srgbClr val="075985"/>
+                </a:solidFill>
+                <a:latin typeface="Calibri" pitchFamily="34" charset="0"/>
+                <a:ea typeface="Calibri" pitchFamily="34" charset="-122"/>
+                <a:cs typeface="Calibri" pitchFamily="34" charset="-120"/>
+              </a:rPr>
+              <a:t>UNDERSTAND NOW</a:t>
+            </a:r>
+            <a:endParaRPr lang="en-US" sz="1100" dirty="0"/>
+          </a:p>
+        </p:txBody>
+      </p:sp>
       <p:sp>
         <p:nvSpPr>
           <p:cNvPr id="25" name="Slide Number Placeholder 0"/>
@@ -4873,6 +5306,133 @@
       </p:sp>
       <p:sp>
         <p:nvSpPr>
+          <p:cNvPr id="5" name="Shape 2"/>
+          <p:cNvSpPr/>
+          <p:nvPr/>
+        </p:nvSpPr>
+        <p:spPr>
+          <a:xfrm>
+            <a:off x="8025079" y="91440"/>
+            <a:ext cx="3617976" cy="274320"/>
+          </a:xfrm>
+          <a:prstGeom prst="rect">
+            <a:avLst/>
+          </a:prstGeom>
+          <a:solidFill>
+            <a:srgbClr val="E0F2FE"/>
+          </a:solidFill>
+          <a:ln w="12700">
+            <a:solidFill>
+              <a:srgbClr val="0369A1"/>
+            </a:solidFill>
+            <a:prstDash val="solid"/>
+          </a:ln>
+        </p:spPr>
+      </p:sp>
+      <p:sp>
+        <p:nvSpPr>
+          <p:cNvPr id="6" name="Shape 3"/>
+          <p:cNvSpPr/>
+          <p:nvPr/>
+        </p:nvSpPr>
+        <p:spPr>
+          <a:xfrm>
+            <a:off x="8025079" y="91440"/>
+            <a:ext cx="73152" cy="274320"/>
+          </a:xfrm>
+          <a:prstGeom prst="rect">
+            <a:avLst/>
+          </a:prstGeom>
+          <a:solidFill>
+            <a:srgbClr val="0369A1"/>
+          </a:solidFill>
+          <a:ln w="12700">
+            <a:solidFill>
+              <a:srgbClr val="0369A1"/>
+            </a:solidFill>
+            <a:prstDash val="solid"/>
+          </a:ln>
+        </p:spPr>
+      </p:sp>
+      <p:pic>
+        <p:nvPicPr>
+          <p:cNvPr id="7" name="Image 0" descr="preencoded.png">    </p:cNvPr>
+          <p:cNvPicPr>
+            <a:picLocks noChangeAspect="1"/>
+          </p:cNvPicPr>
+          <p:nvPr/>
+        </p:nvPicPr>
+        <p:blipFill>
+          <a:blip r:embed="rId1"/>
+          <a:stretch>
+            <a:fillRect/>
+          </a:stretch>
+        </p:blipFill>
+        <p:spPr>
+          <a:xfrm>
+            <a:off x="8153095" y="128016"/>
+            <a:ext cx="201168" cy="201168"/>
+          </a:xfrm>
+          <a:prstGeom prst="rect">
+            <a:avLst/>
+          </a:prstGeom>
+        </p:spPr>
+      </p:pic>
+      <p:sp>
+        <p:nvSpPr>
+          <p:cNvPr id="8" name="Text 4"/>
+          <p:cNvSpPr txBox="1"/>
+          <p:nvPr/>
+        </p:nvSpPr>
+        <p:spPr>
+          <a:xfrm>
+            <a:off x="8409127" y="91440"/>
+            <a:ext cx="3197352" cy="274320"/>
+          </a:xfrm>
+          <a:prstGeom prst="rect">
+            <a:avLst/>
+          </a:prstGeom>
+          <a:noFill/>
+          <a:ln/>
+        </p:spPr>
+        <p:txBody>
+          <a:bodyPr wrap="square" lIns="0" tIns="0" rIns="0" bIns="0" rtlCol="0" anchor="ctr"/>
+          <a:lstStyle/>
+          <a:p>
+            <a:pPr indent="0" marL="0">
+              <a:buNone/>
+            </a:pPr>
+            <a:r>
+              <a:rPr lang="en-US" sz="1100" b="1" dirty="0">
+                <a:solidFill>
+                  <a:srgbClr val="075985"/>
+                </a:solidFill>
+                <a:latin typeface="Calibri" pitchFamily="34" charset="0"/>
+                <a:ea typeface="Calibri" pitchFamily="34" charset="-122"/>
+                <a:cs typeface="Calibri" pitchFamily="34" charset="-120"/>
+              </a:rPr>
+              <a:t>UNDERSTAND NOW</a:t>
+            </a:r>
+            <a:pPr indent="0" marL="0">
+              <a:buNone/>
+            </a:pPr>
+            <a:r>
+              <a:rPr lang="en-US" sz="1100" dirty="0">
+                <a:solidFill>
+                  <a:srgbClr val="075985"/>
+                </a:solidFill>
+                <a:latin typeface="Calibri" pitchFamily="34" charset="0"/>
+                <a:ea typeface="Calibri" pitchFamily="34" charset="-122"/>
+                <a:cs typeface="Calibri" pitchFamily="34" charset="-120"/>
+              </a:rPr>
+              <a:t> · GPU and FPGA accelerators</a:t>
+            </a:r>
+            <a:endParaRPr lang="en-US" sz="1100" dirty="0"/>
+          </a:p>
+        </p:txBody>
+      </p:sp>
+      <p:sp>
+        <p:nvSpPr>
           <p:cNvPr id="25" name="Slide Number Placeholder 0"/>
           <p:cNvSpPr>
             <a:spLocks noGrp="1"/>
@@ -5373,6 +5933,158 @@
       </p:sp>
       <p:sp>
         <p:nvSpPr>
+          <p:cNvPr id="5" name="Shape 3"/>
+          <p:cNvSpPr/>
+          <p:nvPr/>
+        </p:nvSpPr>
+        <p:spPr>
+          <a:xfrm>
+            <a:off x="8959672" y="91440"/>
+            <a:ext cx="2683383" cy="274320"/>
+          </a:xfrm>
+          <a:prstGeom prst="rect">
+            <a:avLst/>
+          </a:prstGeom>
+          <a:solidFill>
+            <a:srgbClr val="FEF3C7"/>
+          </a:solidFill>
+          <a:ln w="12700">
+            <a:solidFill>
+              <a:srgbClr val="B45309"/>
+            </a:solidFill>
+            <a:prstDash val="solid"/>
+          </a:ln>
+        </p:spPr>
+      </p:sp>
+      <p:sp>
+        <p:nvSpPr>
+          <p:cNvPr id="6" name="Shape 4"/>
+          <p:cNvSpPr/>
+          <p:nvPr/>
+        </p:nvSpPr>
+        <p:spPr>
+          <a:xfrm>
+            <a:off x="8959672" y="91440"/>
+            <a:ext cx="27432" cy="274320"/>
+          </a:xfrm>
+          <a:prstGeom prst="rect">
+            <a:avLst/>
+          </a:prstGeom>
+          <a:solidFill>
+            <a:srgbClr val="B45309"/>
+          </a:solidFill>
+          <a:ln w="12700">
+            <a:solidFill>
+              <a:srgbClr val="B45309"/>
+            </a:solidFill>
+            <a:prstDash val="solid"/>
+          </a:ln>
+        </p:spPr>
+      </p:sp>
+      <p:sp>
+        <p:nvSpPr>
+          <p:cNvPr id="7" name="Shape 5"/>
+          <p:cNvSpPr/>
+          <p:nvPr/>
+        </p:nvSpPr>
+        <p:spPr>
+          <a:xfrm>
+            <a:off x="9014536" y="91440"/>
+            <a:ext cx="27432" cy="274320"/>
+          </a:xfrm>
+          <a:prstGeom prst="rect">
+            <a:avLst/>
+          </a:prstGeom>
+          <a:solidFill>
+            <a:srgbClr val="B45309"/>
+          </a:solidFill>
+          <a:ln w="12700">
+            <a:solidFill>
+              <a:srgbClr val="B45309"/>
+            </a:solidFill>
+            <a:prstDash val="solid"/>
+          </a:ln>
+        </p:spPr>
+      </p:sp>
+      <p:pic>
+        <p:nvPicPr>
+          <p:cNvPr id="8" name="Image 0" descr="preencoded.png">    </p:cNvPr>
+          <p:cNvPicPr>
+            <a:picLocks noChangeAspect="1"/>
+          </p:cNvPicPr>
+          <p:nvPr/>
+        </p:nvPicPr>
+        <p:blipFill>
+          <a:blip r:embed="rId1"/>
+          <a:stretch>
+            <a:fillRect/>
+          </a:stretch>
+        </p:blipFill>
+        <p:spPr>
+          <a:xfrm>
+            <a:off x="9087688" y="128016"/>
+            <a:ext cx="201168" cy="201168"/>
+          </a:xfrm>
+          <a:prstGeom prst="rect">
+            <a:avLst/>
+          </a:prstGeom>
+        </p:spPr>
+      </p:pic>
+      <p:sp>
+        <p:nvSpPr>
+          <p:cNvPr id="9" name="Text 6"/>
+          <p:cNvSpPr txBox="1"/>
+          <p:nvPr/>
+        </p:nvSpPr>
+        <p:spPr>
+          <a:xfrm>
+            <a:off x="9343720" y="91440"/>
+            <a:ext cx="2262759" cy="274320"/>
+          </a:xfrm>
+          <a:prstGeom prst="rect">
+            <a:avLst/>
+          </a:prstGeom>
+          <a:noFill/>
+          <a:ln/>
+        </p:spPr>
+        <p:txBody>
+          <a:bodyPr wrap="square" lIns="0" tIns="0" rIns="0" bIns="0" rtlCol="0" anchor="ctr"/>
+          <a:lstStyle/>
+          <a:p>
+            <a:pPr indent="0" marL="0">
+              <a:buNone/>
+            </a:pPr>
+            <a:r>
+              <a:rPr lang="en-US" sz="1100" b="1" dirty="0">
+                <a:solidFill>
+                  <a:srgbClr val="92400E"/>
+                </a:solidFill>
+                <a:latin typeface="Calibri" pitchFamily="34" charset="0"/>
+                <a:ea typeface="Calibri" pitchFamily="34" charset="-122"/>
+                <a:cs typeface="Calibri" pitchFamily="34" charset="-120"/>
+              </a:rPr>
+              <a:t>USE NOW</a:t>
+            </a:r>
+            <a:pPr indent="0" marL="0">
+              <a:buNone/>
+            </a:pPr>
+            <a:r>
+              <a:rPr lang="en-US" sz="1100" dirty="0">
+                <a:solidFill>
+                  <a:srgbClr val="92400E"/>
+                </a:solidFill>
+                <a:latin typeface="Calibri" pitchFamily="34" charset="0"/>
+                <a:ea typeface="Calibri" pitchFamily="34" charset="-122"/>
+                <a:cs typeface="Calibri" pitchFamily="34" charset="-120"/>
+              </a:rPr>
+              <a:t> · the complete program</a:t>
+            </a:r>
+            <a:endParaRPr lang="en-US" sz="1100" dirty="0"/>
+          </a:p>
+        </p:txBody>
+      </p:sp>
+      <p:sp>
+        <p:nvSpPr>
           <p:cNvPr id="25" name="Slide Number Placeholder 0"/>
           <p:cNvSpPr>
             <a:spLocks noGrp="1"/>
@@ -5909,6 +6621,158 @@
       </p:sp>
       <p:sp>
         <p:nvSpPr>
+          <p:cNvPr id="5" name="Shape 3"/>
+          <p:cNvSpPr/>
+          <p:nvPr/>
+        </p:nvSpPr>
+        <p:spPr>
+          <a:xfrm>
+            <a:off x="8959672" y="91440"/>
+            <a:ext cx="2683383" cy="274320"/>
+          </a:xfrm>
+          <a:prstGeom prst="rect">
+            <a:avLst/>
+          </a:prstGeom>
+          <a:solidFill>
+            <a:srgbClr val="FEF3C7"/>
+          </a:solidFill>
+          <a:ln w="12700">
+            <a:solidFill>
+              <a:srgbClr val="B45309"/>
+            </a:solidFill>
+            <a:prstDash val="solid"/>
+          </a:ln>
+        </p:spPr>
+      </p:sp>
+      <p:sp>
+        <p:nvSpPr>
+          <p:cNvPr id="6" name="Shape 4"/>
+          <p:cNvSpPr/>
+          <p:nvPr/>
+        </p:nvSpPr>
+        <p:spPr>
+          <a:xfrm>
+            <a:off x="8959672" y="91440"/>
+            <a:ext cx="27432" cy="274320"/>
+          </a:xfrm>
+          <a:prstGeom prst="rect">
+            <a:avLst/>
+          </a:prstGeom>
+          <a:solidFill>
+            <a:srgbClr val="B45309"/>
+          </a:solidFill>
+          <a:ln w="12700">
+            <a:solidFill>
+              <a:srgbClr val="B45309"/>
+            </a:solidFill>
+            <a:prstDash val="solid"/>
+          </a:ln>
+        </p:spPr>
+      </p:sp>
+      <p:sp>
+        <p:nvSpPr>
+          <p:cNvPr id="7" name="Shape 5"/>
+          <p:cNvSpPr/>
+          <p:nvPr/>
+        </p:nvSpPr>
+        <p:spPr>
+          <a:xfrm>
+            <a:off x="9014536" y="91440"/>
+            <a:ext cx="27432" cy="274320"/>
+          </a:xfrm>
+          <a:prstGeom prst="rect">
+            <a:avLst/>
+          </a:prstGeom>
+          <a:solidFill>
+            <a:srgbClr val="B45309"/>
+          </a:solidFill>
+          <a:ln w="12700">
+            <a:solidFill>
+              <a:srgbClr val="B45309"/>
+            </a:solidFill>
+            <a:prstDash val="solid"/>
+          </a:ln>
+        </p:spPr>
+      </p:sp>
+      <p:pic>
+        <p:nvPicPr>
+          <p:cNvPr id="8" name="Image 0" descr="preencoded.png">    </p:cNvPr>
+          <p:cNvPicPr>
+            <a:picLocks noChangeAspect="1"/>
+          </p:cNvPicPr>
+          <p:nvPr/>
+        </p:nvPicPr>
+        <p:blipFill>
+          <a:blip r:embed="rId1"/>
+          <a:stretch>
+            <a:fillRect/>
+          </a:stretch>
+        </p:blipFill>
+        <p:spPr>
+          <a:xfrm>
+            <a:off x="9087688" y="128016"/>
+            <a:ext cx="201168" cy="201168"/>
+          </a:xfrm>
+          <a:prstGeom prst="rect">
+            <a:avLst/>
+          </a:prstGeom>
+        </p:spPr>
+      </p:pic>
+      <p:sp>
+        <p:nvSpPr>
+          <p:cNvPr id="9" name="Text 6"/>
+          <p:cNvSpPr txBox="1"/>
+          <p:nvPr/>
+        </p:nvSpPr>
+        <p:spPr>
+          <a:xfrm>
+            <a:off x="9343720" y="91440"/>
+            <a:ext cx="2262759" cy="274320"/>
+          </a:xfrm>
+          <a:prstGeom prst="rect">
+            <a:avLst/>
+          </a:prstGeom>
+          <a:noFill/>
+          <a:ln/>
+        </p:spPr>
+        <p:txBody>
+          <a:bodyPr wrap="square" lIns="0" tIns="0" rIns="0" bIns="0" rtlCol="0" anchor="ctr"/>
+          <a:lstStyle/>
+          <a:p>
+            <a:pPr indent="0" marL="0">
+              <a:buNone/>
+            </a:pPr>
+            <a:r>
+              <a:rPr lang="en-US" sz="1100" b="1" dirty="0">
+                <a:solidFill>
+                  <a:srgbClr val="92400E"/>
+                </a:solidFill>
+                <a:latin typeface="Calibri" pitchFamily="34" charset="0"/>
+                <a:ea typeface="Calibri" pitchFamily="34" charset="-122"/>
+                <a:cs typeface="Calibri" pitchFamily="34" charset="-120"/>
+              </a:rPr>
+              <a:t>USE NOW</a:t>
+            </a:r>
+            <a:pPr indent="0" marL="0">
+              <a:buNone/>
+            </a:pPr>
+            <a:r>
+              <a:rPr lang="en-US" sz="1100" dirty="0">
+                <a:solidFill>
+                  <a:srgbClr val="92400E"/>
+                </a:solidFill>
+                <a:latin typeface="Calibri" pitchFamily="34" charset="0"/>
+                <a:ea typeface="Calibri" pitchFamily="34" charset="-122"/>
+                <a:cs typeface="Calibri" pitchFamily="34" charset="-120"/>
+              </a:rPr>
+              <a:t> · the complete program</a:t>
+            </a:r>
+            <a:endParaRPr lang="en-US" sz="1100" dirty="0"/>
+          </a:p>
+        </p:txBody>
+      </p:sp>
+      <p:sp>
+        <p:nvSpPr>
           <p:cNvPr id="25" name="Slide Number Placeholder 0"/>
           <p:cNvSpPr>
             <a:spLocks noGrp="1"/>
@@ -6273,6 +7137,158 @@
       </p:sp>
       <p:sp>
         <p:nvSpPr>
+          <p:cNvPr id="5" name="Shape 3"/>
+          <p:cNvSpPr/>
+          <p:nvPr/>
+        </p:nvSpPr>
+        <p:spPr>
+          <a:xfrm>
+            <a:off x="8959672" y="91440"/>
+            <a:ext cx="2683383" cy="274320"/>
+          </a:xfrm>
+          <a:prstGeom prst="rect">
+            <a:avLst/>
+          </a:prstGeom>
+          <a:solidFill>
+            <a:srgbClr val="FEF3C7"/>
+          </a:solidFill>
+          <a:ln w="12700">
+            <a:solidFill>
+              <a:srgbClr val="B45309"/>
+            </a:solidFill>
+            <a:prstDash val="solid"/>
+          </a:ln>
+        </p:spPr>
+      </p:sp>
+      <p:sp>
+        <p:nvSpPr>
+          <p:cNvPr id="6" name="Shape 4"/>
+          <p:cNvSpPr/>
+          <p:nvPr/>
+        </p:nvSpPr>
+        <p:spPr>
+          <a:xfrm>
+            <a:off x="8959672" y="91440"/>
+            <a:ext cx="27432" cy="274320"/>
+          </a:xfrm>
+          <a:prstGeom prst="rect">
+            <a:avLst/>
+          </a:prstGeom>
+          <a:solidFill>
+            <a:srgbClr val="B45309"/>
+          </a:solidFill>
+          <a:ln w="12700">
+            <a:solidFill>
+              <a:srgbClr val="B45309"/>
+            </a:solidFill>
+            <a:prstDash val="solid"/>
+          </a:ln>
+        </p:spPr>
+      </p:sp>
+      <p:sp>
+        <p:nvSpPr>
+          <p:cNvPr id="7" name="Shape 5"/>
+          <p:cNvSpPr/>
+          <p:nvPr/>
+        </p:nvSpPr>
+        <p:spPr>
+          <a:xfrm>
+            <a:off x="9014536" y="91440"/>
+            <a:ext cx="27432" cy="274320"/>
+          </a:xfrm>
+          <a:prstGeom prst="rect">
+            <a:avLst/>
+          </a:prstGeom>
+          <a:solidFill>
+            <a:srgbClr val="B45309"/>
+          </a:solidFill>
+          <a:ln w="12700">
+            <a:solidFill>
+              <a:srgbClr val="B45309"/>
+            </a:solidFill>
+            <a:prstDash val="solid"/>
+          </a:ln>
+        </p:spPr>
+      </p:sp>
+      <p:pic>
+        <p:nvPicPr>
+          <p:cNvPr id="8" name="Image 0" descr="preencoded.png">    </p:cNvPr>
+          <p:cNvPicPr>
+            <a:picLocks noChangeAspect="1"/>
+          </p:cNvPicPr>
+          <p:nvPr/>
+        </p:nvPicPr>
+        <p:blipFill>
+          <a:blip r:embed="rId1"/>
+          <a:stretch>
+            <a:fillRect/>
+          </a:stretch>
+        </p:blipFill>
+        <p:spPr>
+          <a:xfrm>
+            <a:off x="9087688" y="128016"/>
+            <a:ext cx="201168" cy="201168"/>
+          </a:xfrm>
+          <a:prstGeom prst="rect">
+            <a:avLst/>
+          </a:prstGeom>
+        </p:spPr>
+      </p:pic>
+      <p:sp>
+        <p:nvSpPr>
+          <p:cNvPr id="9" name="Text 6"/>
+          <p:cNvSpPr txBox="1"/>
+          <p:nvPr/>
+        </p:nvSpPr>
+        <p:spPr>
+          <a:xfrm>
+            <a:off x="9343720" y="91440"/>
+            <a:ext cx="2262759" cy="274320"/>
+          </a:xfrm>
+          <a:prstGeom prst="rect">
+            <a:avLst/>
+          </a:prstGeom>
+          <a:noFill/>
+          <a:ln/>
+        </p:spPr>
+        <p:txBody>
+          <a:bodyPr wrap="square" lIns="0" tIns="0" rIns="0" bIns="0" rtlCol="0" anchor="ctr"/>
+          <a:lstStyle/>
+          <a:p>
+            <a:pPr indent="0" marL="0">
+              <a:buNone/>
+            </a:pPr>
+            <a:r>
+              <a:rPr lang="en-US" sz="1100" b="1" dirty="0">
+                <a:solidFill>
+                  <a:srgbClr val="92400E"/>
+                </a:solidFill>
+                <a:latin typeface="Calibri" pitchFamily="34" charset="0"/>
+                <a:ea typeface="Calibri" pitchFamily="34" charset="-122"/>
+                <a:cs typeface="Calibri" pitchFamily="34" charset="-120"/>
+              </a:rPr>
+              <a:t>USE NOW</a:t>
+            </a:r>
+            <a:pPr indent="0" marL="0">
+              <a:buNone/>
+            </a:pPr>
+            <a:r>
+              <a:rPr lang="en-US" sz="1100" dirty="0">
+                <a:solidFill>
+                  <a:srgbClr val="92400E"/>
+                </a:solidFill>
+                <a:latin typeface="Calibri" pitchFamily="34" charset="0"/>
+                <a:ea typeface="Calibri" pitchFamily="34" charset="-122"/>
+                <a:cs typeface="Calibri" pitchFamily="34" charset="-120"/>
+              </a:rPr>
+              <a:t> · the complete program</a:t>
+            </a:r>
+            <a:endParaRPr lang="en-US" sz="1100" dirty="0"/>
+          </a:p>
+        </p:txBody>
+      </p:sp>
+      <p:sp>
+        <p:nvSpPr>
           <p:cNvPr id="25" name="Slide Number Placeholder 0"/>
           <p:cNvSpPr>
             <a:spLocks noGrp="1"/>
@@ -6810,6 +7826,158 @@
       </p:sp>
       <p:sp>
         <p:nvSpPr>
+          <p:cNvPr id="5" name="Shape 3"/>
+          <p:cNvSpPr/>
+          <p:nvPr/>
+        </p:nvSpPr>
+        <p:spPr>
+          <a:xfrm>
+            <a:off x="8959672" y="91440"/>
+            <a:ext cx="2683383" cy="274320"/>
+          </a:xfrm>
+          <a:prstGeom prst="rect">
+            <a:avLst/>
+          </a:prstGeom>
+          <a:solidFill>
+            <a:srgbClr val="FEF3C7"/>
+          </a:solidFill>
+          <a:ln w="12700">
+            <a:solidFill>
+              <a:srgbClr val="B45309"/>
+            </a:solidFill>
+            <a:prstDash val="solid"/>
+          </a:ln>
+        </p:spPr>
+      </p:sp>
+      <p:sp>
+        <p:nvSpPr>
+          <p:cNvPr id="6" name="Shape 4"/>
+          <p:cNvSpPr/>
+          <p:nvPr/>
+        </p:nvSpPr>
+        <p:spPr>
+          <a:xfrm>
+            <a:off x="8959672" y="91440"/>
+            <a:ext cx="27432" cy="274320"/>
+          </a:xfrm>
+          <a:prstGeom prst="rect">
+            <a:avLst/>
+          </a:prstGeom>
+          <a:solidFill>
+            <a:srgbClr val="B45309"/>
+          </a:solidFill>
+          <a:ln w="12700">
+            <a:solidFill>
+              <a:srgbClr val="B45309"/>
+            </a:solidFill>
+            <a:prstDash val="solid"/>
+          </a:ln>
+        </p:spPr>
+      </p:sp>
+      <p:sp>
+        <p:nvSpPr>
+          <p:cNvPr id="7" name="Shape 5"/>
+          <p:cNvSpPr/>
+          <p:nvPr/>
+        </p:nvSpPr>
+        <p:spPr>
+          <a:xfrm>
+            <a:off x="9014536" y="91440"/>
+            <a:ext cx="27432" cy="274320"/>
+          </a:xfrm>
+          <a:prstGeom prst="rect">
+            <a:avLst/>
+          </a:prstGeom>
+          <a:solidFill>
+            <a:srgbClr val="B45309"/>
+          </a:solidFill>
+          <a:ln w="12700">
+            <a:solidFill>
+              <a:srgbClr val="B45309"/>
+            </a:solidFill>
+            <a:prstDash val="solid"/>
+          </a:ln>
+        </p:spPr>
+      </p:sp>
+      <p:pic>
+        <p:nvPicPr>
+          <p:cNvPr id="8" name="Image 0" descr="preencoded.png">    </p:cNvPr>
+          <p:cNvPicPr>
+            <a:picLocks noChangeAspect="1"/>
+          </p:cNvPicPr>
+          <p:nvPr/>
+        </p:nvPicPr>
+        <p:blipFill>
+          <a:blip r:embed="rId1"/>
+          <a:stretch>
+            <a:fillRect/>
+          </a:stretch>
+        </p:blipFill>
+        <p:spPr>
+          <a:xfrm>
+            <a:off x="9087688" y="128016"/>
+            <a:ext cx="201168" cy="201168"/>
+          </a:xfrm>
+          <a:prstGeom prst="rect">
+            <a:avLst/>
+          </a:prstGeom>
+        </p:spPr>
+      </p:pic>
+      <p:sp>
+        <p:nvSpPr>
+          <p:cNvPr id="9" name="Text 6"/>
+          <p:cNvSpPr txBox="1"/>
+          <p:nvPr/>
+        </p:nvSpPr>
+        <p:spPr>
+          <a:xfrm>
+            <a:off x="9343720" y="91440"/>
+            <a:ext cx="2262759" cy="274320"/>
+          </a:xfrm>
+          <a:prstGeom prst="rect">
+            <a:avLst/>
+          </a:prstGeom>
+          <a:noFill/>
+          <a:ln/>
+        </p:spPr>
+        <p:txBody>
+          <a:bodyPr wrap="square" lIns="0" tIns="0" rIns="0" bIns="0" rtlCol="0" anchor="ctr"/>
+          <a:lstStyle/>
+          <a:p>
+            <a:pPr indent="0" marL="0">
+              <a:buNone/>
+            </a:pPr>
+            <a:r>
+              <a:rPr lang="en-US" sz="1100" b="1" dirty="0">
+                <a:solidFill>
+                  <a:srgbClr val="92400E"/>
+                </a:solidFill>
+                <a:latin typeface="Calibri" pitchFamily="34" charset="0"/>
+                <a:ea typeface="Calibri" pitchFamily="34" charset="-122"/>
+                <a:cs typeface="Calibri" pitchFamily="34" charset="-120"/>
+              </a:rPr>
+              <a:t>USE NOW</a:t>
+            </a:r>
+            <a:pPr indent="0" marL="0">
+              <a:buNone/>
+            </a:pPr>
+            <a:r>
+              <a:rPr lang="en-US" sz="1100" dirty="0">
+                <a:solidFill>
+                  <a:srgbClr val="92400E"/>
+                </a:solidFill>
+                <a:latin typeface="Calibri" pitchFamily="34" charset="0"/>
+                <a:ea typeface="Calibri" pitchFamily="34" charset="-122"/>
+                <a:cs typeface="Calibri" pitchFamily="34" charset="-120"/>
+              </a:rPr>
+              <a:t> · the complete program</a:t>
+            </a:r>
+            <a:endParaRPr lang="en-US" sz="1100" dirty="0"/>
+          </a:p>
+        </p:txBody>
+      </p:sp>
+      <p:sp>
+        <p:nvSpPr>
           <p:cNvPr id="25" name="Slide Number Placeholder 0"/>
           <p:cNvSpPr>
             <a:spLocks noGrp="1"/>
@@ -7963,6 +9131,158 @@
       </p:sp>
       <p:sp>
         <p:nvSpPr>
+          <p:cNvPr id="17" name="Shape 15"/>
+          <p:cNvSpPr/>
+          <p:nvPr/>
+        </p:nvSpPr>
+        <p:spPr>
+          <a:xfrm>
+            <a:off x="9287967" y="91440"/>
+            <a:ext cx="2355088" cy="274320"/>
+          </a:xfrm>
+          <a:prstGeom prst="rect">
+            <a:avLst/>
+          </a:prstGeom>
+          <a:solidFill>
+            <a:srgbClr val="FEF3C7"/>
+          </a:solidFill>
+          <a:ln w="12700">
+            <a:solidFill>
+              <a:srgbClr val="B45309"/>
+            </a:solidFill>
+            <a:prstDash val="solid"/>
+          </a:ln>
+        </p:spPr>
+      </p:sp>
+      <p:sp>
+        <p:nvSpPr>
+          <p:cNvPr id="18" name="Shape 16"/>
+          <p:cNvSpPr/>
+          <p:nvPr/>
+        </p:nvSpPr>
+        <p:spPr>
+          <a:xfrm>
+            <a:off x="9287967" y="91440"/>
+            <a:ext cx="27432" cy="274320"/>
+          </a:xfrm>
+          <a:prstGeom prst="rect">
+            <a:avLst/>
+          </a:prstGeom>
+          <a:solidFill>
+            <a:srgbClr val="B45309"/>
+          </a:solidFill>
+          <a:ln w="12700">
+            <a:solidFill>
+              <a:srgbClr val="B45309"/>
+            </a:solidFill>
+            <a:prstDash val="solid"/>
+          </a:ln>
+        </p:spPr>
+      </p:sp>
+      <p:sp>
+        <p:nvSpPr>
+          <p:cNvPr id="19" name="Shape 17"/>
+          <p:cNvSpPr/>
+          <p:nvPr/>
+        </p:nvSpPr>
+        <p:spPr>
+          <a:xfrm>
+            <a:off x="9342831" y="91440"/>
+            <a:ext cx="27432" cy="274320"/>
+          </a:xfrm>
+          <a:prstGeom prst="rect">
+            <a:avLst/>
+          </a:prstGeom>
+          <a:solidFill>
+            <a:srgbClr val="B45309"/>
+          </a:solidFill>
+          <a:ln w="12700">
+            <a:solidFill>
+              <a:srgbClr val="B45309"/>
+            </a:solidFill>
+            <a:prstDash val="solid"/>
+          </a:ln>
+        </p:spPr>
+      </p:sp>
+      <p:pic>
+        <p:nvPicPr>
+          <p:cNvPr id="20" name="Image 0" descr="preencoded.png">    </p:cNvPr>
+          <p:cNvPicPr>
+            <a:picLocks noChangeAspect="1"/>
+          </p:cNvPicPr>
+          <p:nvPr/>
+        </p:nvPicPr>
+        <p:blipFill>
+          <a:blip r:embed="rId1"/>
+          <a:stretch>
+            <a:fillRect/>
+          </a:stretch>
+        </p:blipFill>
+        <p:spPr>
+          <a:xfrm>
+            <a:off x="9415983" y="128016"/>
+            <a:ext cx="201168" cy="201168"/>
+          </a:xfrm>
+          <a:prstGeom prst="rect">
+            <a:avLst/>
+          </a:prstGeom>
+        </p:spPr>
+      </p:pic>
+      <p:sp>
+        <p:nvSpPr>
+          <p:cNvPr id="21" name="Text 18"/>
+          <p:cNvSpPr txBox="1"/>
+          <p:nvPr/>
+        </p:nvSpPr>
+        <p:spPr>
+          <a:xfrm>
+            <a:off x="9672015" y="91440"/>
+            <a:ext cx="1934464" cy="274320"/>
+          </a:xfrm>
+          <a:prstGeom prst="rect">
+            <a:avLst/>
+          </a:prstGeom>
+          <a:noFill/>
+          <a:ln/>
+        </p:spPr>
+        <p:txBody>
+          <a:bodyPr wrap="square" lIns="0" tIns="0" rIns="0" bIns="0" rtlCol="0" anchor="ctr"/>
+          <a:lstStyle/>
+          <a:p>
+            <a:pPr indent="0" marL="0">
+              <a:buNone/>
+            </a:pPr>
+            <a:r>
+              <a:rPr lang="en-US" sz="1100" b="1" dirty="0">
+                <a:solidFill>
+                  <a:srgbClr val="92400E"/>
+                </a:solidFill>
+                <a:latin typeface="Calibri" pitchFamily="34" charset="0"/>
+                <a:ea typeface="Calibri" pitchFamily="34" charset="-122"/>
+                <a:cs typeface="Calibri" pitchFamily="34" charset="-120"/>
+              </a:rPr>
+              <a:t>USE NOW</a:t>
+            </a:r>
+            <a:pPr indent="0" marL="0">
+              <a:buNone/>
+            </a:pPr>
+            <a:r>
+              <a:rPr lang="en-US" sz="1100" dirty="0">
+                <a:solidFill>
+                  <a:srgbClr val="92400E"/>
+                </a:solidFill>
+                <a:latin typeface="Calibri" pitchFamily="34" charset="0"/>
+                <a:ea typeface="Calibri" pitchFamily="34" charset="-122"/>
+                <a:cs typeface="Calibri" pitchFamily="34" charset="-120"/>
+              </a:rPr>
+              <a:t> · the PRG32 tools</a:t>
+            </a:r>
+            <a:endParaRPr lang="en-US" sz="1100" dirty="0"/>
+          </a:p>
+        </p:txBody>
+      </p:sp>
+      <p:sp>
+        <p:nvSpPr>
           <p:cNvPr id="25" name="Slide Number Placeholder 0"/>
           <p:cNvSpPr>
             <a:spLocks noGrp="1"/>
@@ -8799,6 +10119,158 @@
       </p:sp>
       <p:sp>
         <p:nvSpPr>
+          <p:cNvPr id="17" name="Shape 15"/>
+          <p:cNvSpPr/>
+          <p:nvPr/>
+        </p:nvSpPr>
+        <p:spPr>
+          <a:xfrm>
+            <a:off x="9287967" y="91440"/>
+            <a:ext cx="2355088" cy="274320"/>
+          </a:xfrm>
+          <a:prstGeom prst="rect">
+            <a:avLst/>
+          </a:prstGeom>
+          <a:solidFill>
+            <a:srgbClr val="FEF3C7"/>
+          </a:solidFill>
+          <a:ln w="12700">
+            <a:solidFill>
+              <a:srgbClr val="B45309"/>
+            </a:solidFill>
+            <a:prstDash val="solid"/>
+          </a:ln>
+        </p:spPr>
+      </p:sp>
+      <p:sp>
+        <p:nvSpPr>
+          <p:cNvPr id="18" name="Shape 16"/>
+          <p:cNvSpPr/>
+          <p:nvPr/>
+        </p:nvSpPr>
+        <p:spPr>
+          <a:xfrm>
+            <a:off x="9287967" y="91440"/>
+            <a:ext cx="27432" cy="274320"/>
+          </a:xfrm>
+          <a:prstGeom prst="rect">
+            <a:avLst/>
+          </a:prstGeom>
+          <a:solidFill>
+            <a:srgbClr val="B45309"/>
+          </a:solidFill>
+          <a:ln w="12700">
+            <a:solidFill>
+              <a:srgbClr val="B45309"/>
+            </a:solidFill>
+            <a:prstDash val="solid"/>
+          </a:ln>
+        </p:spPr>
+      </p:sp>
+      <p:sp>
+        <p:nvSpPr>
+          <p:cNvPr id="19" name="Shape 17"/>
+          <p:cNvSpPr/>
+          <p:nvPr/>
+        </p:nvSpPr>
+        <p:spPr>
+          <a:xfrm>
+            <a:off x="9342831" y="91440"/>
+            <a:ext cx="27432" cy="274320"/>
+          </a:xfrm>
+          <a:prstGeom prst="rect">
+            <a:avLst/>
+          </a:prstGeom>
+          <a:solidFill>
+            <a:srgbClr val="B45309"/>
+          </a:solidFill>
+          <a:ln w="12700">
+            <a:solidFill>
+              <a:srgbClr val="B45309"/>
+            </a:solidFill>
+            <a:prstDash val="solid"/>
+          </a:ln>
+        </p:spPr>
+      </p:sp>
+      <p:pic>
+        <p:nvPicPr>
+          <p:cNvPr id="20" name="Image 0" descr="preencoded.png">    </p:cNvPr>
+          <p:cNvPicPr>
+            <a:picLocks noChangeAspect="1"/>
+          </p:cNvPicPr>
+          <p:nvPr/>
+        </p:nvPicPr>
+        <p:blipFill>
+          <a:blip r:embed="rId1"/>
+          <a:stretch>
+            <a:fillRect/>
+          </a:stretch>
+        </p:blipFill>
+        <p:spPr>
+          <a:xfrm>
+            <a:off x="9415983" y="128016"/>
+            <a:ext cx="201168" cy="201168"/>
+          </a:xfrm>
+          <a:prstGeom prst="rect">
+            <a:avLst/>
+          </a:prstGeom>
+        </p:spPr>
+      </p:pic>
+      <p:sp>
+        <p:nvSpPr>
+          <p:cNvPr id="21" name="Text 18"/>
+          <p:cNvSpPr txBox="1"/>
+          <p:nvPr/>
+        </p:nvSpPr>
+        <p:spPr>
+          <a:xfrm>
+            <a:off x="9672015" y="91440"/>
+            <a:ext cx="1934464" cy="274320"/>
+          </a:xfrm>
+          <a:prstGeom prst="rect">
+            <a:avLst/>
+          </a:prstGeom>
+          <a:noFill/>
+          <a:ln/>
+        </p:spPr>
+        <p:txBody>
+          <a:bodyPr wrap="square" lIns="0" tIns="0" rIns="0" bIns="0" rtlCol="0" anchor="ctr"/>
+          <a:lstStyle/>
+          <a:p>
+            <a:pPr indent="0" marL="0">
+              <a:buNone/>
+            </a:pPr>
+            <a:r>
+              <a:rPr lang="en-US" sz="1100" b="1" dirty="0">
+                <a:solidFill>
+                  <a:srgbClr val="92400E"/>
+                </a:solidFill>
+                <a:latin typeface="Calibri" pitchFamily="34" charset="0"/>
+                <a:ea typeface="Calibri" pitchFamily="34" charset="-122"/>
+                <a:cs typeface="Calibri" pitchFamily="34" charset="-120"/>
+              </a:rPr>
+              <a:t>USE NOW</a:t>
+            </a:r>
+            <a:pPr indent="0" marL="0">
+              <a:buNone/>
+            </a:pPr>
+            <a:r>
+              <a:rPr lang="en-US" sz="1100" dirty="0">
+                <a:solidFill>
+                  <a:srgbClr val="92400E"/>
+                </a:solidFill>
+                <a:latin typeface="Calibri" pitchFamily="34" charset="0"/>
+                <a:ea typeface="Calibri" pitchFamily="34" charset="-122"/>
+                <a:cs typeface="Calibri" pitchFamily="34" charset="-120"/>
+              </a:rPr>
+              <a:t> · the PRG32 tools</a:t>
+            </a:r>
+            <a:endParaRPr lang="en-US" sz="1100" dirty="0"/>
+          </a:p>
+        </p:txBody>
+      </p:sp>
+      <p:sp>
+        <p:nvSpPr>
           <p:cNvPr id="25" name="Slide Number Placeholder 0"/>
           <p:cNvSpPr>
             <a:spLocks noGrp="1"/>
@@ -9635,6 +11107,158 @@
       </p:sp>
       <p:sp>
         <p:nvSpPr>
+          <p:cNvPr id="17" name="Shape 15"/>
+          <p:cNvSpPr/>
+          <p:nvPr/>
+        </p:nvSpPr>
+        <p:spPr>
+          <a:xfrm>
+            <a:off x="9287967" y="91440"/>
+            <a:ext cx="2355088" cy="274320"/>
+          </a:xfrm>
+          <a:prstGeom prst="rect">
+            <a:avLst/>
+          </a:prstGeom>
+          <a:solidFill>
+            <a:srgbClr val="FEF3C7"/>
+          </a:solidFill>
+          <a:ln w="12700">
+            <a:solidFill>
+              <a:srgbClr val="B45309"/>
+            </a:solidFill>
+            <a:prstDash val="solid"/>
+          </a:ln>
+        </p:spPr>
+      </p:sp>
+      <p:sp>
+        <p:nvSpPr>
+          <p:cNvPr id="18" name="Shape 16"/>
+          <p:cNvSpPr/>
+          <p:nvPr/>
+        </p:nvSpPr>
+        <p:spPr>
+          <a:xfrm>
+            <a:off x="9287967" y="91440"/>
+            <a:ext cx="27432" cy="274320"/>
+          </a:xfrm>
+          <a:prstGeom prst="rect">
+            <a:avLst/>
+          </a:prstGeom>
+          <a:solidFill>
+            <a:srgbClr val="B45309"/>
+          </a:solidFill>
+          <a:ln w="12700">
+            <a:solidFill>
+              <a:srgbClr val="B45309"/>
+            </a:solidFill>
+            <a:prstDash val="solid"/>
+          </a:ln>
+        </p:spPr>
+      </p:sp>
+      <p:sp>
+        <p:nvSpPr>
+          <p:cNvPr id="19" name="Shape 17"/>
+          <p:cNvSpPr/>
+          <p:nvPr/>
+        </p:nvSpPr>
+        <p:spPr>
+          <a:xfrm>
+            <a:off x="9342831" y="91440"/>
+            <a:ext cx="27432" cy="274320"/>
+          </a:xfrm>
+          <a:prstGeom prst="rect">
+            <a:avLst/>
+          </a:prstGeom>
+          <a:solidFill>
+            <a:srgbClr val="B45309"/>
+          </a:solidFill>
+          <a:ln w="12700">
+            <a:solidFill>
+              <a:srgbClr val="B45309"/>
+            </a:solidFill>
+            <a:prstDash val="solid"/>
+          </a:ln>
+        </p:spPr>
+      </p:sp>
+      <p:pic>
+        <p:nvPicPr>
+          <p:cNvPr id="20" name="Image 0" descr="preencoded.png">    </p:cNvPr>
+          <p:cNvPicPr>
+            <a:picLocks noChangeAspect="1"/>
+          </p:cNvPicPr>
+          <p:nvPr/>
+        </p:nvPicPr>
+        <p:blipFill>
+          <a:blip r:embed="rId1"/>
+          <a:stretch>
+            <a:fillRect/>
+          </a:stretch>
+        </p:blipFill>
+        <p:spPr>
+          <a:xfrm>
+            <a:off x="9415983" y="128016"/>
+            <a:ext cx="201168" cy="201168"/>
+          </a:xfrm>
+          <a:prstGeom prst="rect">
+            <a:avLst/>
+          </a:prstGeom>
+        </p:spPr>
+      </p:pic>
+      <p:sp>
+        <p:nvSpPr>
+          <p:cNvPr id="21" name="Text 18"/>
+          <p:cNvSpPr txBox="1"/>
+          <p:nvPr/>
+        </p:nvSpPr>
+        <p:spPr>
+          <a:xfrm>
+            <a:off x="9672015" y="91440"/>
+            <a:ext cx="1934464" cy="274320"/>
+          </a:xfrm>
+          <a:prstGeom prst="rect">
+            <a:avLst/>
+          </a:prstGeom>
+          <a:noFill/>
+          <a:ln/>
+        </p:spPr>
+        <p:txBody>
+          <a:bodyPr wrap="square" lIns="0" tIns="0" rIns="0" bIns="0" rtlCol="0" anchor="ctr"/>
+          <a:lstStyle/>
+          <a:p>
+            <a:pPr indent="0" marL="0">
+              <a:buNone/>
+            </a:pPr>
+            <a:r>
+              <a:rPr lang="en-US" sz="1100" b="1" dirty="0">
+                <a:solidFill>
+                  <a:srgbClr val="92400E"/>
+                </a:solidFill>
+                <a:latin typeface="Calibri" pitchFamily="34" charset="0"/>
+                <a:ea typeface="Calibri" pitchFamily="34" charset="-122"/>
+                <a:cs typeface="Calibri" pitchFamily="34" charset="-120"/>
+              </a:rPr>
+              <a:t>USE NOW</a:t>
+            </a:r>
+            <a:pPr indent="0" marL="0">
+              <a:buNone/>
+            </a:pPr>
+            <a:r>
+              <a:rPr lang="en-US" sz="1100" dirty="0">
+                <a:solidFill>
+                  <a:srgbClr val="92400E"/>
+                </a:solidFill>
+                <a:latin typeface="Calibri" pitchFamily="34" charset="0"/>
+                <a:ea typeface="Calibri" pitchFamily="34" charset="-122"/>
+                <a:cs typeface="Calibri" pitchFamily="34" charset="-120"/>
+              </a:rPr>
+              <a:t> · the PRG32 tools</a:t>
+            </a:r>
+            <a:endParaRPr lang="en-US" sz="1100" dirty="0"/>
+          </a:p>
+        </p:txBody>
+      </p:sp>
+      <p:sp>
+        <p:nvSpPr>
           <p:cNvPr id="25" name="Slide Number Placeholder 0"/>
           <p:cNvSpPr>
             <a:spLocks noGrp="1"/>
@@ -10415,6 +12039,158 @@
               <a:t>Use upstream QEMU here, not the Espressif fork</a:t>
             </a:r>
             <a:endParaRPr lang="en-US" sz="1200" dirty="0"/>
+          </a:p>
+        </p:txBody>
+      </p:sp>
+      <p:sp>
+        <p:nvSpPr>
+          <p:cNvPr id="17" name="Shape 15"/>
+          <p:cNvSpPr/>
+          <p:nvPr/>
+        </p:nvSpPr>
+        <p:spPr>
+          <a:xfrm>
+            <a:off x="9287967" y="91440"/>
+            <a:ext cx="2355088" cy="274320"/>
+          </a:xfrm>
+          <a:prstGeom prst="rect">
+            <a:avLst/>
+          </a:prstGeom>
+          <a:solidFill>
+            <a:srgbClr val="FEF3C7"/>
+          </a:solidFill>
+          <a:ln w="12700">
+            <a:solidFill>
+              <a:srgbClr val="B45309"/>
+            </a:solidFill>
+            <a:prstDash val="solid"/>
+          </a:ln>
+        </p:spPr>
+      </p:sp>
+      <p:sp>
+        <p:nvSpPr>
+          <p:cNvPr id="18" name="Shape 16"/>
+          <p:cNvSpPr/>
+          <p:nvPr/>
+        </p:nvSpPr>
+        <p:spPr>
+          <a:xfrm>
+            <a:off x="9287967" y="91440"/>
+            <a:ext cx="27432" cy="274320"/>
+          </a:xfrm>
+          <a:prstGeom prst="rect">
+            <a:avLst/>
+          </a:prstGeom>
+          <a:solidFill>
+            <a:srgbClr val="B45309"/>
+          </a:solidFill>
+          <a:ln w="12700">
+            <a:solidFill>
+              <a:srgbClr val="B45309"/>
+            </a:solidFill>
+            <a:prstDash val="solid"/>
+          </a:ln>
+        </p:spPr>
+      </p:sp>
+      <p:sp>
+        <p:nvSpPr>
+          <p:cNvPr id="19" name="Shape 17"/>
+          <p:cNvSpPr/>
+          <p:nvPr/>
+        </p:nvSpPr>
+        <p:spPr>
+          <a:xfrm>
+            <a:off x="9342831" y="91440"/>
+            <a:ext cx="27432" cy="274320"/>
+          </a:xfrm>
+          <a:prstGeom prst="rect">
+            <a:avLst/>
+          </a:prstGeom>
+          <a:solidFill>
+            <a:srgbClr val="B45309"/>
+          </a:solidFill>
+          <a:ln w="12700">
+            <a:solidFill>
+              <a:srgbClr val="B45309"/>
+            </a:solidFill>
+            <a:prstDash val="solid"/>
+          </a:ln>
+        </p:spPr>
+      </p:sp>
+      <p:pic>
+        <p:nvPicPr>
+          <p:cNvPr id="20" name="Image 0" descr="preencoded.png">    </p:cNvPr>
+          <p:cNvPicPr>
+            <a:picLocks noChangeAspect="1"/>
+          </p:cNvPicPr>
+          <p:nvPr/>
+        </p:nvPicPr>
+        <p:blipFill>
+          <a:blip r:embed="rId1"/>
+          <a:stretch>
+            <a:fillRect/>
+          </a:stretch>
+        </p:blipFill>
+        <p:spPr>
+          <a:xfrm>
+            <a:off x="9415983" y="128016"/>
+            <a:ext cx="201168" cy="201168"/>
+          </a:xfrm>
+          <a:prstGeom prst="rect">
+            <a:avLst/>
+          </a:prstGeom>
+        </p:spPr>
+      </p:pic>
+      <p:sp>
+        <p:nvSpPr>
+          <p:cNvPr id="21" name="Text 18"/>
+          <p:cNvSpPr txBox="1"/>
+          <p:nvPr/>
+        </p:nvSpPr>
+        <p:spPr>
+          <a:xfrm>
+            <a:off x="9672015" y="91440"/>
+            <a:ext cx="1934464" cy="274320"/>
+          </a:xfrm>
+          <a:prstGeom prst="rect">
+            <a:avLst/>
+          </a:prstGeom>
+          <a:noFill/>
+          <a:ln/>
+        </p:spPr>
+        <p:txBody>
+          <a:bodyPr wrap="square" lIns="0" tIns="0" rIns="0" bIns="0" rtlCol="0" anchor="ctr"/>
+          <a:lstStyle/>
+          <a:p>
+            <a:pPr indent="0" marL="0">
+              <a:buNone/>
+            </a:pPr>
+            <a:r>
+              <a:rPr lang="en-US" sz="1100" b="1" dirty="0">
+                <a:solidFill>
+                  <a:srgbClr val="92400E"/>
+                </a:solidFill>
+                <a:latin typeface="Calibri" pitchFamily="34" charset="0"/>
+                <a:ea typeface="Calibri" pitchFamily="34" charset="-122"/>
+                <a:cs typeface="Calibri" pitchFamily="34" charset="-120"/>
+              </a:rPr>
+              <a:t>USE NOW</a:t>
+            </a:r>
+            <a:pPr indent="0" marL="0">
+              <a:buNone/>
+            </a:pPr>
+            <a:r>
+              <a:rPr lang="en-US" sz="1100" dirty="0">
+                <a:solidFill>
+                  <a:srgbClr val="92400E"/>
+                </a:solidFill>
+                <a:latin typeface="Calibri" pitchFamily="34" charset="0"/>
+                <a:ea typeface="Calibri" pitchFamily="34" charset="-122"/>
+                <a:cs typeface="Calibri" pitchFamily="34" charset="-120"/>
+              </a:rPr>
+              <a:t> · the PRG32 tools</a:t>
+            </a:r>
+            <a:endParaRPr lang="en-US" sz="1100" dirty="0"/>
           </a:p>
         </p:txBody>
       </p:sp>
@@ -12360,6 +14136,158 @@
       </p:graphicFrame>
       <p:sp>
         <p:nvSpPr>
+          <p:cNvPr id="4" name="Shape 1"/>
+          <p:cNvSpPr/>
+          <p:nvPr/>
+        </p:nvSpPr>
+        <p:spPr>
+          <a:xfrm>
+            <a:off x="9287967" y="91440"/>
+            <a:ext cx="2355088" cy="274320"/>
+          </a:xfrm>
+          <a:prstGeom prst="rect">
+            <a:avLst/>
+          </a:prstGeom>
+          <a:solidFill>
+            <a:srgbClr val="FEF3C7"/>
+          </a:solidFill>
+          <a:ln w="12700">
+            <a:solidFill>
+              <a:srgbClr val="B45309"/>
+            </a:solidFill>
+            <a:prstDash val="solid"/>
+          </a:ln>
+        </p:spPr>
+      </p:sp>
+      <p:sp>
+        <p:nvSpPr>
+          <p:cNvPr id="5" name="Shape 2"/>
+          <p:cNvSpPr/>
+          <p:nvPr/>
+        </p:nvSpPr>
+        <p:spPr>
+          <a:xfrm>
+            <a:off x="9287967" y="91440"/>
+            <a:ext cx="27432" cy="274320"/>
+          </a:xfrm>
+          <a:prstGeom prst="rect">
+            <a:avLst/>
+          </a:prstGeom>
+          <a:solidFill>
+            <a:srgbClr val="B45309"/>
+          </a:solidFill>
+          <a:ln w="12700">
+            <a:solidFill>
+              <a:srgbClr val="B45309"/>
+            </a:solidFill>
+            <a:prstDash val="solid"/>
+          </a:ln>
+        </p:spPr>
+      </p:sp>
+      <p:sp>
+        <p:nvSpPr>
+          <p:cNvPr id="6" name="Shape 3"/>
+          <p:cNvSpPr/>
+          <p:nvPr/>
+        </p:nvSpPr>
+        <p:spPr>
+          <a:xfrm>
+            <a:off x="9342831" y="91440"/>
+            <a:ext cx="27432" cy="274320"/>
+          </a:xfrm>
+          <a:prstGeom prst="rect">
+            <a:avLst/>
+          </a:prstGeom>
+          <a:solidFill>
+            <a:srgbClr val="B45309"/>
+          </a:solidFill>
+          <a:ln w="12700">
+            <a:solidFill>
+              <a:srgbClr val="B45309"/>
+            </a:solidFill>
+            <a:prstDash val="solid"/>
+          </a:ln>
+        </p:spPr>
+      </p:sp>
+      <p:pic>
+        <p:nvPicPr>
+          <p:cNvPr id="7" name="Image 0" descr="preencoded.png">    </p:cNvPr>
+          <p:cNvPicPr>
+            <a:picLocks noChangeAspect="1"/>
+          </p:cNvPicPr>
+          <p:nvPr/>
+        </p:nvPicPr>
+        <p:blipFill>
+          <a:blip r:embed="rId1"/>
+          <a:stretch>
+            <a:fillRect/>
+          </a:stretch>
+        </p:blipFill>
+        <p:spPr>
+          <a:xfrm>
+            <a:off x="9415983" y="128016"/>
+            <a:ext cx="201168" cy="201168"/>
+          </a:xfrm>
+          <a:prstGeom prst="rect">
+            <a:avLst/>
+          </a:prstGeom>
+        </p:spPr>
+      </p:pic>
+      <p:sp>
+        <p:nvSpPr>
+          <p:cNvPr id="8" name="Text 4"/>
+          <p:cNvSpPr txBox="1"/>
+          <p:nvPr/>
+        </p:nvSpPr>
+        <p:spPr>
+          <a:xfrm>
+            <a:off x="9672015" y="91440"/>
+            <a:ext cx="1934464" cy="274320"/>
+          </a:xfrm>
+          <a:prstGeom prst="rect">
+            <a:avLst/>
+          </a:prstGeom>
+          <a:noFill/>
+          <a:ln/>
+        </p:spPr>
+        <p:txBody>
+          <a:bodyPr wrap="square" lIns="0" tIns="0" rIns="0" bIns="0" rtlCol="0" anchor="ctr"/>
+          <a:lstStyle/>
+          <a:p>
+            <a:pPr indent="0" marL="0">
+              <a:buNone/>
+            </a:pPr>
+            <a:r>
+              <a:rPr lang="en-US" sz="1100" b="1" dirty="0">
+                <a:solidFill>
+                  <a:srgbClr val="92400E"/>
+                </a:solidFill>
+                <a:latin typeface="Calibri" pitchFamily="34" charset="0"/>
+                <a:ea typeface="Calibri" pitchFamily="34" charset="-122"/>
+                <a:cs typeface="Calibri" pitchFamily="34" charset="-120"/>
+              </a:rPr>
+              <a:t>USE NOW</a:t>
+            </a:r>
+            <a:pPr indent="0" marL="0">
+              <a:buNone/>
+            </a:pPr>
+            <a:r>
+              <a:rPr lang="en-US" sz="1100" dirty="0">
+                <a:solidFill>
+                  <a:srgbClr val="92400E"/>
+                </a:solidFill>
+                <a:latin typeface="Calibri" pitchFamily="34" charset="0"/>
+                <a:ea typeface="Calibri" pitchFamily="34" charset="-122"/>
+                <a:cs typeface="Calibri" pitchFamily="34" charset="-120"/>
+              </a:rPr>
+              <a:t> · the PRG32 tools</a:t>
+            </a:r>
+            <a:endParaRPr lang="en-US" sz="1100" dirty="0"/>
+          </a:p>
+        </p:txBody>
+      </p:sp>
+      <p:sp>
+        <p:nvSpPr>
           <p:cNvPr id="25" name="Slide Number Placeholder 0"/>
           <p:cNvSpPr>
             <a:spLocks noGrp="1"/>
@@ -13802,6 +15730,133 @@
       </p:sp>
       <p:sp>
         <p:nvSpPr>
+          <p:cNvPr id="17" name="Shape 15"/>
+          <p:cNvSpPr/>
+          <p:nvPr/>
+        </p:nvSpPr>
+        <p:spPr>
+          <a:xfrm>
+            <a:off x="8090738" y="91440"/>
+            <a:ext cx="3552317" cy="274320"/>
+          </a:xfrm>
+          <a:prstGeom prst="rect">
+            <a:avLst/>
+          </a:prstGeom>
+          <a:solidFill>
+            <a:srgbClr val="E0F2FE"/>
+          </a:solidFill>
+          <a:ln w="12700">
+            <a:solidFill>
+              <a:srgbClr val="0369A1"/>
+            </a:solidFill>
+            <a:prstDash val="solid"/>
+          </a:ln>
+        </p:spPr>
+      </p:sp>
+      <p:sp>
+        <p:nvSpPr>
+          <p:cNvPr id="18" name="Shape 16"/>
+          <p:cNvSpPr/>
+          <p:nvPr/>
+        </p:nvSpPr>
+        <p:spPr>
+          <a:xfrm>
+            <a:off x="8090738" y="91440"/>
+            <a:ext cx="73152" cy="274320"/>
+          </a:xfrm>
+          <a:prstGeom prst="rect">
+            <a:avLst/>
+          </a:prstGeom>
+          <a:solidFill>
+            <a:srgbClr val="0369A1"/>
+          </a:solidFill>
+          <a:ln w="12700">
+            <a:solidFill>
+              <a:srgbClr val="0369A1"/>
+            </a:solidFill>
+            <a:prstDash val="solid"/>
+          </a:ln>
+        </p:spPr>
+      </p:sp>
+      <p:pic>
+        <p:nvPicPr>
+          <p:cNvPr id="19" name="Image 0" descr="preencoded.png">    </p:cNvPr>
+          <p:cNvPicPr>
+            <a:picLocks noChangeAspect="1"/>
+          </p:cNvPicPr>
+          <p:nvPr/>
+        </p:nvPicPr>
+        <p:blipFill>
+          <a:blip r:embed="rId1"/>
+          <a:stretch>
+            <a:fillRect/>
+          </a:stretch>
+        </p:blipFill>
+        <p:spPr>
+          <a:xfrm>
+            <a:off x="8218754" y="128016"/>
+            <a:ext cx="201168" cy="201168"/>
+          </a:xfrm>
+          <a:prstGeom prst="rect">
+            <a:avLst/>
+          </a:prstGeom>
+        </p:spPr>
+      </p:pic>
+      <p:sp>
+        <p:nvSpPr>
+          <p:cNvPr id="20" name="Text 17"/>
+          <p:cNvSpPr txBox="1"/>
+          <p:nvPr/>
+        </p:nvSpPr>
+        <p:spPr>
+          <a:xfrm>
+            <a:off x="8474786" y="91440"/>
+            <a:ext cx="3131693" cy="274320"/>
+          </a:xfrm>
+          <a:prstGeom prst="rect">
+            <a:avLst/>
+          </a:prstGeom>
+          <a:noFill/>
+          <a:ln/>
+        </p:spPr>
+        <p:txBody>
+          <a:bodyPr wrap="square" lIns="0" tIns="0" rIns="0" bIns="0" rtlCol="0" anchor="ctr"/>
+          <a:lstStyle/>
+          <a:p>
+            <a:pPr indent="0" marL="0">
+              <a:buNone/>
+            </a:pPr>
+            <a:r>
+              <a:rPr lang="en-US" sz="1100" b="1" dirty="0">
+                <a:solidFill>
+                  <a:srgbClr val="075985"/>
+                </a:solidFill>
+                <a:latin typeface="Calibri" pitchFamily="34" charset="0"/>
+                <a:ea typeface="Calibri" pitchFamily="34" charset="-122"/>
+                <a:cs typeface="Calibri" pitchFamily="34" charset="-120"/>
+              </a:rPr>
+              <a:t>UNDERSTAND NOW</a:t>
+            </a:r>
+            <a:pPr indent="0" marL="0">
+              <a:buNone/>
+            </a:pPr>
+            <a:r>
+              <a:rPr lang="en-US" sz="1100" dirty="0">
+                <a:solidFill>
+                  <a:srgbClr val="075985"/>
+                </a:solidFill>
+                <a:latin typeface="Calibri" pitchFamily="34" charset="0"/>
+                <a:ea typeface="Calibri" pitchFamily="34" charset="-122"/>
+                <a:cs typeface="Calibri" pitchFamily="34" charset="-120"/>
+              </a:rPr>
+              <a:t> · the performance equation</a:t>
+            </a:r>
+            <a:endParaRPr lang="en-US" sz="1100" dirty="0"/>
+          </a:p>
+        </p:txBody>
+      </p:sp>
+      <p:sp>
+        <p:nvSpPr>
           <p:cNvPr id="25" name="Slide Number Placeholder 0"/>
           <p:cNvSpPr>
             <a:spLocks noGrp="1"/>
@@ -14589,6 +16644,133 @@
       </p:sp>
       <p:sp>
         <p:nvSpPr>
+          <p:cNvPr id="17" name="Shape 15"/>
+          <p:cNvSpPr/>
+          <p:nvPr/>
+        </p:nvSpPr>
+        <p:spPr>
+          <a:xfrm>
+            <a:off x="8222056" y="91440"/>
+            <a:ext cx="3420999" cy="274320"/>
+          </a:xfrm>
+          <a:prstGeom prst="rect">
+            <a:avLst/>
+          </a:prstGeom>
+          <a:solidFill>
+            <a:srgbClr val="E0F2FE"/>
+          </a:solidFill>
+          <a:ln w="12700">
+            <a:solidFill>
+              <a:srgbClr val="0369A1"/>
+            </a:solidFill>
+            <a:prstDash val="solid"/>
+          </a:ln>
+        </p:spPr>
+      </p:sp>
+      <p:sp>
+        <p:nvSpPr>
+          <p:cNvPr id="18" name="Shape 16"/>
+          <p:cNvSpPr/>
+          <p:nvPr/>
+        </p:nvSpPr>
+        <p:spPr>
+          <a:xfrm>
+            <a:off x="8222056" y="91440"/>
+            <a:ext cx="73152" cy="274320"/>
+          </a:xfrm>
+          <a:prstGeom prst="rect">
+            <a:avLst/>
+          </a:prstGeom>
+          <a:solidFill>
+            <a:srgbClr val="0369A1"/>
+          </a:solidFill>
+          <a:ln w="12700">
+            <a:solidFill>
+              <a:srgbClr val="0369A1"/>
+            </a:solidFill>
+            <a:prstDash val="solid"/>
+          </a:ln>
+        </p:spPr>
+      </p:sp>
+      <p:pic>
+        <p:nvPicPr>
+          <p:cNvPr id="19" name="Image 0" descr="preencoded.png">    </p:cNvPr>
+          <p:cNvPicPr>
+            <a:picLocks noChangeAspect="1"/>
+          </p:cNvPicPr>
+          <p:nvPr/>
+        </p:nvPicPr>
+        <p:blipFill>
+          <a:blip r:embed="rId1"/>
+          <a:stretch>
+            <a:fillRect/>
+          </a:stretch>
+        </p:blipFill>
+        <p:spPr>
+          <a:xfrm>
+            <a:off x="8350072" y="128016"/>
+            <a:ext cx="201168" cy="201168"/>
+          </a:xfrm>
+          <a:prstGeom prst="rect">
+            <a:avLst/>
+          </a:prstGeom>
+        </p:spPr>
+      </p:pic>
+      <p:sp>
+        <p:nvSpPr>
+          <p:cNvPr id="20" name="Text 17"/>
+          <p:cNvSpPr txBox="1"/>
+          <p:nvPr/>
+        </p:nvSpPr>
+        <p:spPr>
+          <a:xfrm>
+            <a:off x="8606104" y="91440"/>
+            <a:ext cx="3000375" cy="274320"/>
+          </a:xfrm>
+          <a:prstGeom prst="rect">
+            <a:avLst/>
+          </a:prstGeom>
+          <a:noFill/>
+          <a:ln/>
+        </p:spPr>
+        <p:txBody>
+          <a:bodyPr wrap="square" lIns="0" tIns="0" rIns="0" bIns="0" rtlCol="0" anchor="ctr"/>
+          <a:lstStyle/>
+          <a:p>
+            <a:pPr indent="0" marL="0">
+              <a:buNone/>
+            </a:pPr>
+            <a:r>
+              <a:rPr lang="en-US" sz="1100" b="1" dirty="0">
+                <a:solidFill>
+                  <a:srgbClr val="075985"/>
+                </a:solidFill>
+                <a:latin typeface="Calibri" pitchFamily="34" charset="0"/>
+                <a:ea typeface="Calibri" pitchFamily="34" charset="-122"/>
+                <a:cs typeface="Calibri" pitchFamily="34" charset="-120"/>
+              </a:rPr>
+              <a:t>UNDERSTAND NOW</a:t>
+            </a:r>
+            <a:pPr indent="0" marL="0">
+              <a:buNone/>
+            </a:pPr>
+            <a:r>
+              <a:rPr lang="en-US" sz="1100" dirty="0">
+                <a:solidFill>
+                  <a:srgbClr val="075985"/>
+                </a:solidFill>
+                <a:latin typeface="Calibri" pitchFamily="34" charset="0"/>
+                <a:ea typeface="Calibri" pitchFamily="34" charset="-122"/>
+                <a:cs typeface="Calibri" pitchFamily="34" charset="-120"/>
+              </a:rPr>
+              <a:t> · superscalar processors</a:t>
+            </a:r>
+            <a:endParaRPr lang="en-US" sz="1100" dirty="0"/>
+          </a:p>
+        </p:txBody>
+      </p:sp>
+      <p:sp>
+        <p:nvSpPr>
           <p:cNvPr id="25" name="Slide Number Placeholder 0"/>
           <p:cNvSpPr>
             <a:spLocks noGrp="1"/>
@@ -15337,6 +17519,133 @@
       </p:sp>
       <p:sp>
         <p:nvSpPr>
+          <p:cNvPr id="17" name="Shape 15"/>
+          <p:cNvSpPr/>
+          <p:nvPr/>
+        </p:nvSpPr>
+        <p:spPr>
+          <a:xfrm>
+            <a:off x="8222056" y="91440"/>
+            <a:ext cx="3420999" cy="274320"/>
+          </a:xfrm>
+          <a:prstGeom prst="rect">
+            <a:avLst/>
+          </a:prstGeom>
+          <a:solidFill>
+            <a:srgbClr val="E0F2FE"/>
+          </a:solidFill>
+          <a:ln w="12700">
+            <a:solidFill>
+              <a:srgbClr val="0369A1"/>
+            </a:solidFill>
+            <a:prstDash val="solid"/>
+          </a:ln>
+        </p:spPr>
+      </p:sp>
+      <p:sp>
+        <p:nvSpPr>
+          <p:cNvPr id="18" name="Shape 16"/>
+          <p:cNvSpPr/>
+          <p:nvPr/>
+        </p:nvSpPr>
+        <p:spPr>
+          <a:xfrm>
+            <a:off x="8222056" y="91440"/>
+            <a:ext cx="73152" cy="274320"/>
+          </a:xfrm>
+          <a:prstGeom prst="rect">
+            <a:avLst/>
+          </a:prstGeom>
+          <a:solidFill>
+            <a:srgbClr val="0369A1"/>
+          </a:solidFill>
+          <a:ln w="12700">
+            <a:solidFill>
+              <a:srgbClr val="0369A1"/>
+            </a:solidFill>
+            <a:prstDash val="solid"/>
+          </a:ln>
+        </p:spPr>
+      </p:sp>
+      <p:pic>
+        <p:nvPicPr>
+          <p:cNvPr id="19" name="Image 0" descr="preencoded.png">    </p:cNvPr>
+          <p:cNvPicPr>
+            <a:picLocks noChangeAspect="1"/>
+          </p:cNvPicPr>
+          <p:nvPr/>
+        </p:nvPicPr>
+        <p:blipFill>
+          <a:blip r:embed="rId1"/>
+          <a:stretch>
+            <a:fillRect/>
+          </a:stretch>
+        </p:blipFill>
+        <p:spPr>
+          <a:xfrm>
+            <a:off x="8350072" y="128016"/>
+            <a:ext cx="201168" cy="201168"/>
+          </a:xfrm>
+          <a:prstGeom prst="rect">
+            <a:avLst/>
+          </a:prstGeom>
+        </p:spPr>
+      </p:pic>
+      <p:sp>
+        <p:nvSpPr>
+          <p:cNvPr id="20" name="Text 17"/>
+          <p:cNvSpPr txBox="1"/>
+          <p:nvPr/>
+        </p:nvSpPr>
+        <p:spPr>
+          <a:xfrm>
+            <a:off x="8606104" y="91440"/>
+            <a:ext cx="3000375" cy="274320"/>
+          </a:xfrm>
+          <a:prstGeom prst="rect">
+            <a:avLst/>
+          </a:prstGeom>
+          <a:noFill/>
+          <a:ln/>
+        </p:spPr>
+        <p:txBody>
+          <a:bodyPr wrap="square" lIns="0" tIns="0" rIns="0" bIns="0" rtlCol="0" anchor="ctr"/>
+          <a:lstStyle/>
+          <a:p>
+            <a:pPr indent="0" marL="0">
+              <a:buNone/>
+            </a:pPr>
+            <a:r>
+              <a:rPr lang="en-US" sz="1100" b="1" dirty="0">
+                <a:solidFill>
+                  <a:srgbClr val="075985"/>
+                </a:solidFill>
+                <a:latin typeface="Calibri" pitchFamily="34" charset="0"/>
+                <a:ea typeface="Calibri" pitchFamily="34" charset="-122"/>
+                <a:cs typeface="Calibri" pitchFamily="34" charset="-120"/>
+              </a:rPr>
+              <a:t>UNDERSTAND NOW</a:t>
+            </a:r>
+            <a:pPr indent="0" marL="0">
+              <a:buNone/>
+            </a:pPr>
+            <a:r>
+              <a:rPr lang="en-US" sz="1100" dirty="0">
+                <a:solidFill>
+                  <a:srgbClr val="075985"/>
+                </a:solidFill>
+                <a:latin typeface="Calibri" pitchFamily="34" charset="0"/>
+                <a:ea typeface="Calibri" pitchFamily="34" charset="-122"/>
+                <a:cs typeface="Calibri" pitchFamily="34" charset="-120"/>
+              </a:rPr>
+              <a:t> · superscalar processors</a:t>
+            </a:r>
+            <a:endParaRPr lang="en-US" sz="1100" dirty="0"/>
+          </a:p>
+        </p:txBody>
+      </p:sp>
+      <p:sp>
+        <p:nvSpPr>
           <p:cNvPr id="25" name="Slide Number Placeholder 0"/>
           <p:cNvSpPr>
             <a:spLocks noGrp="1"/>
@@ -16161,6 +18470,133 @@
       </p:sp>
       <p:sp>
         <p:nvSpPr>
+          <p:cNvPr id="17" name="Shape 15"/>
+          <p:cNvSpPr/>
+          <p:nvPr/>
+        </p:nvSpPr>
+        <p:spPr>
+          <a:xfrm>
+            <a:off x="8419033" y="91440"/>
+            <a:ext cx="3224022" cy="274320"/>
+          </a:xfrm>
+          <a:prstGeom prst="rect">
+            <a:avLst/>
+          </a:prstGeom>
+          <a:solidFill>
+            <a:srgbClr val="E0F2FE"/>
+          </a:solidFill>
+          <a:ln w="12700">
+            <a:solidFill>
+              <a:srgbClr val="0369A1"/>
+            </a:solidFill>
+            <a:prstDash val="solid"/>
+          </a:ln>
+        </p:spPr>
+      </p:sp>
+      <p:sp>
+        <p:nvSpPr>
+          <p:cNvPr id="18" name="Shape 16"/>
+          <p:cNvSpPr/>
+          <p:nvPr/>
+        </p:nvSpPr>
+        <p:spPr>
+          <a:xfrm>
+            <a:off x="8419033" y="91440"/>
+            <a:ext cx="73152" cy="274320"/>
+          </a:xfrm>
+          <a:prstGeom prst="rect">
+            <a:avLst/>
+          </a:prstGeom>
+          <a:solidFill>
+            <a:srgbClr val="0369A1"/>
+          </a:solidFill>
+          <a:ln w="12700">
+            <a:solidFill>
+              <a:srgbClr val="0369A1"/>
+            </a:solidFill>
+            <a:prstDash val="solid"/>
+          </a:ln>
+        </p:spPr>
+      </p:sp>
+      <p:pic>
+        <p:nvPicPr>
+          <p:cNvPr id="19" name="Image 0" descr="preencoded.png">    </p:cNvPr>
+          <p:cNvPicPr>
+            <a:picLocks noChangeAspect="1"/>
+          </p:cNvPicPr>
+          <p:nvPr/>
+        </p:nvPicPr>
+        <p:blipFill>
+          <a:blip r:embed="rId1"/>
+          <a:stretch>
+            <a:fillRect/>
+          </a:stretch>
+        </p:blipFill>
+        <p:spPr>
+          <a:xfrm>
+            <a:off x="8547049" y="128016"/>
+            <a:ext cx="201168" cy="201168"/>
+          </a:xfrm>
+          <a:prstGeom prst="rect">
+            <a:avLst/>
+          </a:prstGeom>
+        </p:spPr>
+      </p:pic>
+      <p:sp>
+        <p:nvSpPr>
+          <p:cNvPr id="20" name="Text 17"/>
+          <p:cNvSpPr txBox="1"/>
+          <p:nvPr/>
+        </p:nvSpPr>
+        <p:spPr>
+          <a:xfrm>
+            <a:off x="8803081" y="91440"/>
+            <a:ext cx="2803398" cy="274320"/>
+          </a:xfrm>
+          <a:prstGeom prst="rect">
+            <a:avLst/>
+          </a:prstGeom>
+          <a:noFill/>
+          <a:ln/>
+        </p:spPr>
+        <p:txBody>
+          <a:bodyPr wrap="square" lIns="0" tIns="0" rIns="0" bIns="0" rtlCol="0" anchor="ctr"/>
+          <a:lstStyle/>
+          <a:p>
+            <a:pPr indent="0" marL="0">
+              <a:buNone/>
+            </a:pPr>
+            <a:r>
+              <a:rPr lang="en-US" sz="1100" b="1" dirty="0">
+                <a:solidFill>
+                  <a:srgbClr val="075985"/>
+                </a:solidFill>
+                <a:latin typeface="Calibri" pitchFamily="34" charset="0"/>
+                <a:ea typeface="Calibri" pitchFamily="34" charset="-122"/>
+                <a:cs typeface="Calibri" pitchFamily="34" charset="-120"/>
+              </a:rPr>
+              <a:t>UNDERSTAND NOW</a:t>
+            </a:r>
+            <a:pPr indent="0" marL="0">
+              <a:buNone/>
+            </a:pPr>
+            <a:r>
+              <a:rPr lang="en-US" sz="1100" dirty="0">
+                <a:solidFill>
+                  <a:srgbClr val="075985"/>
+                </a:solidFill>
+                <a:latin typeface="Calibri" pitchFamily="34" charset="0"/>
+                <a:ea typeface="Calibri" pitchFamily="34" charset="-122"/>
+                <a:cs typeface="Calibri" pitchFamily="34" charset="-120"/>
+              </a:rPr>
+              <a:t> · vector instructions</a:t>
+            </a:r>
+            <a:endParaRPr lang="en-US" sz="1100" dirty="0"/>
+          </a:p>
+        </p:txBody>
+      </p:sp>
+      <p:sp>
+        <p:nvSpPr>
           <p:cNvPr id="25" name="Slide Number Placeholder 0"/>
           <p:cNvSpPr>
             <a:spLocks noGrp="1"/>
@@ -17101,6 +19537,133 @@
       </p:sp>
       <p:sp>
         <p:nvSpPr>
+          <p:cNvPr id="17" name="Shape 15"/>
+          <p:cNvSpPr/>
+          <p:nvPr/>
+        </p:nvSpPr>
+        <p:spPr>
+          <a:xfrm>
+            <a:off x="8419033" y="91440"/>
+            <a:ext cx="3224022" cy="274320"/>
+          </a:xfrm>
+          <a:prstGeom prst="rect">
+            <a:avLst/>
+          </a:prstGeom>
+          <a:solidFill>
+            <a:srgbClr val="E0F2FE"/>
+          </a:solidFill>
+          <a:ln w="12700">
+            <a:solidFill>
+              <a:srgbClr val="0369A1"/>
+            </a:solidFill>
+            <a:prstDash val="solid"/>
+          </a:ln>
+        </p:spPr>
+      </p:sp>
+      <p:sp>
+        <p:nvSpPr>
+          <p:cNvPr id="18" name="Shape 16"/>
+          <p:cNvSpPr/>
+          <p:nvPr/>
+        </p:nvSpPr>
+        <p:spPr>
+          <a:xfrm>
+            <a:off x="8419033" y="91440"/>
+            <a:ext cx="73152" cy="274320"/>
+          </a:xfrm>
+          <a:prstGeom prst="rect">
+            <a:avLst/>
+          </a:prstGeom>
+          <a:solidFill>
+            <a:srgbClr val="0369A1"/>
+          </a:solidFill>
+          <a:ln w="12700">
+            <a:solidFill>
+              <a:srgbClr val="0369A1"/>
+            </a:solidFill>
+            <a:prstDash val="solid"/>
+          </a:ln>
+        </p:spPr>
+      </p:sp>
+      <p:pic>
+        <p:nvPicPr>
+          <p:cNvPr id="19" name="Image 0" descr="preencoded.png">    </p:cNvPr>
+          <p:cNvPicPr>
+            <a:picLocks noChangeAspect="1"/>
+          </p:cNvPicPr>
+          <p:nvPr/>
+        </p:nvPicPr>
+        <p:blipFill>
+          <a:blip r:embed="rId1"/>
+          <a:stretch>
+            <a:fillRect/>
+          </a:stretch>
+        </p:blipFill>
+        <p:spPr>
+          <a:xfrm>
+            <a:off x="8547049" y="128016"/>
+            <a:ext cx="201168" cy="201168"/>
+          </a:xfrm>
+          <a:prstGeom prst="rect">
+            <a:avLst/>
+          </a:prstGeom>
+        </p:spPr>
+      </p:pic>
+      <p:sp>
+        <p:nvSpPr>
+          <p:cNvPr id="20" name="Text 17"/>
+          <p:cNvSpPr txBox="1"/>
+          <p:nvPr/>
+        </p:nvSpPr>
+        <p:spPr>
+          <a:xfrm>
+            <a:off x="8803081" y="91440"/>
+            <a:ext cx="2803398" cy="274320"/>
+          </a:xfrm>
+          <a:prstGeom prst="rect">
+            <a:avLst/>
+          </a:prstGeom>
+          <a:noFill/>
+          <a:ln/>
+        </p:spPr>
+        <p:txBody>
+          <a:bodyPr wrap="square" lIns="0" tIns="0" rIns="0" bIns="0" rtlCol="0" anchor="ctr"/>
+          <a:lstStyle/>
+          <a:p>
+            <a:pPr indent="0" marL="0">
+              <a:buNone/>
+            </a:pPr>
+            <a:r>
+              <a:rPr lang="en-US" sz="1100" b="1" dirty="0">
+                <a:solidFill>
+                  <a:srgbClr val="075985"/>
+                </a:solidFill>
+                <a:latin typeface="Calibri" pitchFamily="34" charset="0"/>
+                <a:ea typeface="Calibri" pitchFamily="34" charset="-122"/>
+                <a:cs typeface="Calibri" pitchFamily="34" charset="-120"/>
+              </a:rPr>
+              <a:t>UNDERSTAND NOW</a:t>
+            </a:r>
+            <a:pPr indent="0" marL="0">
+              <a:buNone/>
+            </a:pPr>
+            <a:r>
+              <a:rPr lang="en-US" sz="1100" dirty="0">
+                <a:solidFill>
+                  <a:srgbClr val="075985"/>
+                </a:solidFill>
+                <a:latin typeface="Calibri" pitchFamily="34" charset="0"/>
+                <a:ea typeface="Calibri" pitchFamily="34" charset="-122"/>
+                <a:cs typeface="Calibri" pitchFamily="34" charset="-120"/>
+              </a:rPr>
+              <a:t> · vector instructions</a:t>
+            </a:r>
+            <a:endParaRPr lang="en-US" sz="1100" dirty="0"/>
+          </a:p>
+        </p:txBody>
+      </p:sp>
+      <p:sp>
+        <p:nvSpPr>
           <p:cNvPr id="25" name="Slide Number Placeholder 0"/>
           <p:cNvSpPr>
             <a:spLocks noGrp="1"/>
@@ -17897,6 +20460,133 @@
       </p:sp>
       <p:sp>
         <p:nvSpPr>
+          <p:cNvPr id="17" name="Shape 15"/>
+          <p:cNvSpPr/>
+          <p:nvPr/>
+        </p:nvSpPr>
+        <p:spPr>
+          <a:xfrm>
+            <a:off x="8025079" y="91440"/>
+            <a:ext cx="3617976" cy="274320"/>
+          </a:xfrm>
+          <a:prstGeom prst="rect">
+            <a:avLst/>
+          </a:prstGeom>
+          <a:solidFill>
+            <a:srgbClr val="E0F2FE"/>
+          </a:solidFill>
+          <a:ln w="12700">
+            <a:solidFill>
+              <a:srgbClr val="0369A1"/>
+            </a:solidFill>
+            <a:prstDash val="solid"/>
+          </a:ln>
+        </p:spPr>
+      </p:sp>
+      <p:sp>
+        <p:nvSpPr>
+          <p:cNvPr id="18" name="Shape 16"/>
+          <p:cNvSpPr/>
+          <p:nvPr/>
+        </p:nvSpPr>
+        <p:spPr>
+          <a:xfrm>
+            <a:off x="8025079" y="91440"/>
+            <a:ext cx="73152" cy="274320"/>
+          </a:xfrm>
+          <a:prstGeom prst="rect">
+            <a:avLst/>
+          </a:prstGeom>
+          <a:solidFill>
+            <a:srgbClr val="0369A1"/>
+          </a:solidFill>
+          <a:ln w="12700">
+            <a:solidFill>
+              <a:srgbClr val="0369A1"/>
+            </a:solidFill>
+            <a:prstDash val="solid"/>
+          </a:ln>
+        </p:spPr>
+      </p:sp>
+      <p:pic>
+        <p:nvPicPr>
+          <p:cNvPr id="19" name="Image 0" descr="preencoded.png">    </p:cNvPr>
+          <p:cNvPicPr>
+            <a:picLocks noChangeAspect="1"/>
+          </p:cNvPicPr>
+          <p:nvPr/>
+        </p:nvPicPr>
+        <p:blipFill>
+          <a:blip r:embed="rId1"/>
+          <a:stretch>
+            <a:fillRect/>
+          </a:stretch>
+        </p:blipFill>
+        <p:spPr>
+          <a:xfrm>
+            <a:off x="8153095" y="128016"/>
+            <a:ext cx="201168" cy="201168"/>
+          </a:xfrm>
+          <a:prstGeom prst="rect">
+            <a:avLst/>
+          </a:prstGeom>
+        </p:spPr>
+      </p:pic>
+      <p:sp>
+        <p:nvSpPr>
+          <p:cNvPr id="20" name="Text 17"/>
+          <p:cNvSpPr txBox="1"/>
+          <p:nvPr/>
+        </p:nvSpPr>
+        <p:spPr>
+          <a:xfrm>
+            <a:off x="8409127" y="91440"/>
+            <a:ext cx="3197352" cy="274320"/>
+          </a:xfrm>
+          <a:prstGeom prst="rect">
+            <a:avLst/>
+          </a:prstGeom>
+          <a:noFill/>
+          <a:ln/>
+        </p:spPr>
+        <p:txBody>
+          <a:bodyPr wrap="square" lIns="0" tIns="0" rIns="0" bIns="0" rtlCol="0" anchor="ctr"/>
+          <a:lstStyle/>
+          <a:p>
+            <a:pPr indent="0" marL="0">
+              <a:buNone/>
+            </a:pPr>
+            <a:r>
+              <a:rPr lang="en-US" sz="1100" b="1" dirty="0">
+                <a:solidFill>
+                  <a:srgbClr val="075985"/>
+                </a:solidFill>
+                <a:latin typeface="Calibri" pitchFamily="34" charset="0"/>
+                <a:ea typeface="Calibri" pitchFamily="34" charset="-122"/>
+                <a:cs typeface="Calibri" pitchFamily="34" charset="-120"/>
+              </a:rPr>
+              <a:t>UNDERSTAND NOW</a:t>
+            </a:r>
+            <a:pPr indent="0" marL="0">
+              <a:buNone/>
+            </a:pPr>
+            <a:r>
+              <a:rPr lang="en-US" sz="1100" dirty="0">
+                <a:solidFill>
+                  <a:srgbClr val="075985"/>
+                </a:solidFill>
+                <a:latin typeface="Calibri" pitchFamily="34" charset="0"/>
+                <a:ea typeface="Calibri" pitchFamily="34" charset="-122"/>
+                <a:cs typeface="Calibri" pitchFamily="34" charset="-120"/>
+              </a:rPr>
+              <a:t> · GPU and FPGA accelerators</a:t>
+            </a:r>
+            <a:endParaRPr lang="en-US" sz="1100" dirty="0"/>
+          </a:p>
+        </p:txBody>
+      </p:sp>
+      <p:sp>
+        <p:nvSpPr>
           <p:cNvPr id="25" name="Slide Number Placeholder 0"/>
           <p:cNvSpPr>
             <a:spLocks noGrp="1"/>
@@ -18685,6 +21375,133 @@
               <a:t>On the kit this rule took three instructions and three cycles</a:t>
             </a:r>
             <a:endParaRPr lang="en-US" sz="1200" dirty="0"/>
+          </a:p>
+        </p:txBody>
+      </p:sp>
+      <p:sp>
+        <p:nvSpPr>
+          <p:cNvPr id="17" name="Shape 15"/>
+          <p:cNvSpPr/>
+          <p:nvPr/>
+        </p:nvSpPr>
+        <p:spPr>
+          <a:xfrm>
+            <a:off x="8025079" y="91440"/>
+            <a:ext cx="3617976" cy="274320"/>
+          </a:xfrm>
+          <a:prstGeom prst="rect">
+            <a:avLst/>
+          </a:prstGeom>
+          <a:solidFill>
+            <a:srgbClr val="E0F2FE"/>
+          </a:solidFill>
+          <a:ln w="12700">
+            <a:solidFill>
+              <a:srgbClr val="0369A1"/>
+            </a:solidFill>
+            <a:prstDash val="solid"/>
+          </a:ln>
+        </p:spPr>
+      </p:sp>
+      <p:sp>
+        <p:nvSpPr>
+          <p:cNvPr id="18" name="Shape 16"/>
+          <p:cNvSpPr/>
+          <p:nvPr/>
+        </p:nvSpPr>
+        <p:spPr>
+          <a:xfrm>
+            <a:off x="8025079" y="91440"/>
+            <a:ext cx="73152" cy="274320"/>
+          </a:xfrm>
+          <a:prstGeom prst="rect">
+            <a:avLst/>
+          </a:prstGeom>
+          <a:solidFill>
+            <a:srgbClr val="0369A1"/>
+          </a:solidFill>
+          <a:ln w="12700">
+            <a:solidFill>
+              <a:srgbClr val="0369A1"/>
+            </a:solidFill>
+            <a:prstDash val="solid"/>
+          </a:ln>
+        </p:spPr>
+      </p:sp>
+      <p:pic>
+        <p:nvPicPr>
+          <p:cNvPr id="19" name="Image 0" descr="preencoded.png">    </p:cNvPr>
+          <p:cNvPicPr>
+            <a:picLocks noChangeAspect="1"/>
+          </p:cNvPicPr>
+          <p:nvPr/>
+        </p:nvPicPr>
+        <p:blipFill>
+          <a:blip r:embed="rId1"/>
+          <a:stretch>
+            <a:fillRect/>
+          </a:stretch>
+        </p:blipFill>
+        <p:spPr>
+          <a:xfrm>
+            <a:off x="8153095" y="128016"/>
+            <a:ext cx="201168" cy="201168"/>
+          </a:xfrm>
+          <a:prstGeom prst="rect">
+            <a:avLst/>
+          </a:prstGeom>
+        </p:spPr>
+      </p:pic>
+      <p:sp>
+        <p:nvSpPr>
+          <p:cNvPr id="20" name="Text 17"/>
+          <p:cNvSpPr txBox="1"/>
+          <p:nvPr/>
+        </p:nvSpPr>
+        <p:spPr>
+          <a:xfrm>
+            <a:off x="8409127" y="91440"/>
+            <a:ext cx="3197352" cy="274320"/>
+          </a:xfrm>
+          <a:prstGeom prst="rect">
+            <a:avLst/>
+          </a:prstGeom>
+          <a:noFill/>
+          <a:ln/>
+        </p:spPr>
+        <p:txBody>
+          <a:bodyPr wrap="square" lIns="0" tIns="0" rIns="0" bIns="0" rtlCol="0" anchor="ctr"/>
+          <a:lstStyle/>
+          <a:p>
+            <a:pPr indent="0" marL="0">
+              <a:buNone/>
+            </a:pPr>
+            <a:r>
+              <a:rPr lang="en-US" sz="1100" b="1" dirty="0">
+                <a:solidFill>
+                  <a:srgbClr val="075985"/>
+                </a:solidFill>
+                <a:latin typeface="Calibri" pitchFamily="34" charset="0"/>
+                <a:ea typeface="Calibri" pitchFamily="34" charset="-122"/>
+                <a:cs typeface="Calibri" pitchFamily="34" charset="-120"/>
+              </a:rPr>
+              <a:t>UNDERSTAND NOW</a:t>
+            </a:r>
+            <a:pPr indent="0" marL="0">
+              <a:buNone/>
+            </a:pPr>
+            <a:r>
+              <a:rPr lang="en-US" sz="1100" dirty="0">
+                <a:solidFill>
+                  <a:srgbClr val="075985"/>
+                </a:solidFill>
+                <a:latin typeface="Calibri" pitchFamily="34" charset="0"/>
+                <a:ea typeface="Calibri" pitchFamily="34" charset="-122"/>
+                <a:cs typeface="Calibri" pitchFamily="34" charset="-120"/>
+              </a:rPr>
+              <a:t> · GPU and FPGA accelerators</a:t>
+            </a:r>
+            <a:endParaRPr lang="en-US" sz="1100" dirty="0"/>
           </a:p>
         </p:txBody>
       </p:sp>

--- a/en/slides/24-Computer_Architecture-Superscalar_HPC_GPU_FPGA-Code.pptx
+++ b/en/slides/24-Computer_Architecture-Superscalar_HPC_GPU_FPGA-Code.pptx
@@ -127,45 +127,45 @@
   <p:extLst>
     <p:ext uri="{521415D9-36F7-43E2-AB2F-B90AF26B5E84}">
       <p14:sectionLst xmlns:p14="http://schemas.microsoft.com/office/powerpoint/2010/main">
-        <p14:section name="Opening" id="{48c22e0b-099c-4553-1989-414a3da7aa98}">
+        <p14:section name="Opening" id="{9f92f318-b336-c742-e460-c13593d6581c}">
           <p14:sldIdLst>
             <p14:sldId id="256"/>
             <p14:sldId id="257"/>
           </p14:sldIdLst>
         </p14:section>
-        <p14:section name="Warm-up on the machine" id="{6032f17c-6d24-b45a-0962-58e4af6fd59d}">
+        <p14:section name="Warm-up on the machine" id="{afe9caac-8db2-debb-9294-280c34d708fb}">
           <p14:sldIdLst>
             <p14:sldId id="258"/>
           </p14:sldIdLst>
         </p14:section>
-        <p14:section name="Superscalar processors" id="{c8ff6d58-4028-4b68-beaa-a1abae835313}">
+        <p14:section name="Superscalar processors" id="{efb04d3d-064e-557f-7598-bce55bfeee44}">
           <p14:sldIdLst>
             <p14:sldId id="259"/>
             <p14:sldId id="260"/>
           </p14:sldIdLst>
         </p14:section>
-        <p14:section name="Vectors: one instruction, many data" id="{dd6b2070-c5f9-5894-7d94-e10cbbd991aa}">
+        <p14:section name="Vectors: one instruction, many data" id="{6dbd5a97-3e81-c4d6-e8c7-94e95423922f}">
           <p14:sldIdLst>
             <p14:sldId id="261"/>
             <p14:sldId id="262"/>
           </p14:sldIdLst>
         </p14:section>
-        <p14:section name="GPU accelerators" id="{2215c1e3-6c2d-f046-bf56-84cfa1b55a65}">
+        <p14:section name="GPU accelerators" id="{6d5033df-4735-1419-6886-014d8acaa462}">
           <p14:sldIdLst>
             <p14:sldId id="263"/>
           </p14:sldIdLst>
         </p14:section>
-        <p14:section name="FPGA accelerators" id="{28653c5a-9b91-95b2-1ff5-48027c1c82d5}">
+        <p14:section name="FPGA accelerators" id="{1ff15796-64d8-26da-4126-de1d0111dd70}">
           <p14:sldIdLst>
             <p14:sldId id="264"/>
           </p14:sldIdLst>
         </p14:section>
-        <p14:section name="Back to the machine" id="{a562855b-89fd-4fa7-9564-48809ab0fdd8}">
+        <p14:section name="Back to the machine" id="{ccc699b6-d6ae-aec9-1907-eac2ce9c8de6}">
           <p14:sldIdLst>
             <p14:sldId id="265"/>
           </p14:sldIdLst>
         </p14:section>
-        <p14:section name="The complete program" id="{9c6912db-3c5b-e800-a6e8-2517235ba472}">
+        <p14:section name="The complete program" id="{326c39fa-0c26-eee1-4576-8623041c8555}">
           <p14:sldIdLst>
             <p14:sldId id="266"/>
             <p14:sldId id="267"/>
@@ -173,7 +173,7 @@
             <p14:sldId id="269"/>
           </p14:sldIdLst>
         </p14:section>
-        <p14:section name="Run it and test it" id="{8ad9666b-f574-f9c8-13ac-6515153dbb71}">
+        <p14:section name="Run it and test it" id="{5c0951e7-792c-9263-1c2f-4ea260503733}">
           <p14:sldIdLst>
             <p14:sldId id="270"/>
             <p14:sldId id="271"/>
@@ -183,7 +183,7 @@
             <p14:sldId id="275"/>
           </p14:sldIdLst>
         </p14:section>
-        <p14:section name="Exercises" id="{aa1bcbfe-6b06-78d8-7a2b-51c2e4b5b063}">
+        <p14:section name="Exercises" id="{a9867ef0-5e75-db16-152c-39b1aa010ec4}">
           <p14:sldIdLst>
             <p14:sldId id="276"/>
           </p14:sldIdLst>
